--- a/docs/pptx/auc3/ritu-auc3-linsubhr-ratio-grade3_10pct.pptx
+++ b/docs/pptx/auc3/ritu-auc3-linsubhr-ratio-grade3_10pct.pptx
@@ -2443,7 +2443,7 @@
           </p:nvSpPr>
           <p:spPr>
             <a:xfrm>
-              <a:off x="1012387" y="2073503"/>
+              <a:off x="1013326" y="2073503"/>
               <a:ext cx="0" cy="3649639"/>
             </a:xfrm>
             <a:custGeom>
@@ -2486,7 +2486,7 @@
           </p:nvSpPr>
           <p:spPr>
             <a:xfrm>
-              <a:off x="1914572" y="2073503"/>
+              <a:off x="1915271" y="2073503"/>
               <a:ext cx="0" cy="3649639"/>
             </a:xfrm>
             <a:custGeom>
@@ -2529,7 +2529,7 @@
           </p:nvSpPr>
           <p:spPr>
             <a:xfrm>
-              <a:off x="2816756" y="2073503"/>
+              <a:off x="2817216" y="2073503"/>
               <a:ext cx="0" cy="3649639"/>
             </a:xfrm>
             <a:custGeom>
@@ -2572,7 +2572,7 @@
           </p:nvSpPr>
           <p:spPr>
             <a:xfrm>
-              <a:off x="3718941" y="2073503"/>
+              <a:off x="3719160" y="2073503"/>
               <a:ext cx="0" cy="3649639"/>
             </a:xfrm>
             <a:custGeom>
@@ -2615,7 +2615,7 @@
           </p:nvSpPr>
           <p:spPr>
             <a:xfrm>
-              <a:off x="4621125" y="2073503"/>
+              <a:off x="4621105" y="2073503"/>
               <a:ext cx="0" cy="3649639"/>
             </a:xfrm>
             <a:custGeom>
@@ -2658,7 +2658,7 @@
           </p:nvSpPr>
           <p:spPr>
             <a:xfrm>
-              <a:off x="5523310" y="2073503"/>
+              <a:off x="5523050" y="2073503"/>
               <a:ext cx="0" cy="3649639"/>
             </a:xfrm>
             <a:custGeom>
@@ -2701,7 +2701,7 @@
           </p:nvSpPr>
           <p:spPr>
             <a:xfrm>
-              <a:off x="6425495" y="2073503"/>
+              <a:off x="6424995" y="2073503"/>
               <a:ext cx="0" cy="3649639"/>
             </a:xfrm>
             <a:custGeom>
@@ -2744,7 +2744,7 @@
           </p:nvSpPr>
           <p:spPr>
             <a:xfrm>
-              <a:off x="7327679" y="2073503"/>
+              <a:off x="7326940" y="2073503"/>
               <a:ext cx="0" cy="3649639"/>
             </a:xfrm>
             <a:custGeom>
@@ -2787,7 +2787,7 @@
           </p:nvSpPr>
           <p:spPr>
             <a:xfrm>
-              <a:off x="8229864" y="2073503"/>
+              <a:off x="8228885" y="2073503"/>
               <a:ext cx="0" cy="3649639"/>
             </a:xfrm>
             <a:custGeom>
@@ -3045,7 +3045,7 @@
           </p:nvSpPr>
           <p:spPr>
             <a:xfrm>
-              <a:off x="1463479" y="2073503"/>
+              <a:off x="1464298" y="2073503"/>
               <a:ext cx="0" cy="3649639"/>
             </a:xfrm>
             <a:custGeom>
@@ -3088,7 +3088,7 @@
           </p:nvSpPr>
           <p:spPr>
             <a:xfrm>
-              <a:off x="2365664" y="2073503"/>
+              <a:off x="2366243" y="2073503"/>
               <a:ext cx="0" cy="3649639"/>
             </a:xfrm>
             <a:custGeom>
@@ -3131,7 +3131,7 @@
           </p:nvSpPr>
           <p:spPr>
             <a:xfrm>
-              <a:off x="3267849" y="2073503"/>
+              <a:off x="3268188" y="2073503"/>
               <a:ext cx="0" cy="3649639"/>
             </a:xfrm>
             <a:custGeom>
@@ -3174,7 +3174,7 @@
           </p:nvSpPr>
           <p:spPr>
             <a:xfrm>
-              <a:off x="4170033" y="2073503"/>
+              <a:off x="4170133" y="2073503"/>
               <a:ext cx="0" cy="3649639"/>
             </a:xfrm>
             <a:custGeom>
@@ -3217,7 +3217,7 @@
           </p:nvSpPr>
           <p:spPr>
             <a:xfrm>
-              <a:off x="5072218" y="2073503"/>
+              <a:off x="5072078" y="2073503"/>
               <a:ext cx="0" cy="3649639"/>
             </a:xfrm>
             <a:custGeom>
@@ -3260,7 +3260,7 @@
           </p:nvSpPr>
           <p:spPr>
             <a:xfrm>
-              <a:off x="5974402" y="2073503"/>
+              <a:off x="5974022" y="2073503"/>
               <a:ext cx="0" cy="3649639"/>
             </a:xfrm>
             <a:custGeom>
@@ -3303,7 +3303,7 @@
           </p:nvSpPr>
           <p:spPr>
             <a:xfrm>
-              <a:off x="6876587" y="2073503"/>
+              <a:off x="6875967" y="2073503"/>
               <a:ext cx="0" cy="3649639"/>
             </a:xfrm>
             <a:custGeom>
@@ -3346,7 +3346,7 @@
           </p:nvSpPr>
           <p:spPr>
             <a:xfrm>
-              <a:off x="7778772" y="2073503"/>
+              <a:off x="7777912" y="2073503"/>
               <a:ext cx="0" cy="3649639"/>
             </a:xfrm>
             <a:custGeom>
@@ -3390,521 +3390,521 @@
           <p:spPr>
             <a:xfrm>
               <a:off x="1172049" y="2073503"/>
-              <a:ext cx="7090630" cy="3483039"/>
+              <a:ext cx="7090630" cy="3483234"/>
             </a:xfrm>
             <a:custGeom>
               <a:avLst/>
               <a:pathLst>
-                <a:path w="7090630" h="3483039">
+                <a:path w="7090630" h="3483234">
                   <a:moveTo>
-                    <a:pt x="2161313" y="0"/>
+                    <a:pt x="2204130" y="0"/>
                   </a:moveTo>
                   <a:lnTo>
-                    <a:pt x="2220298" y="340336"/>
-                  </a:lnTo>
-                  <a:lnTo>
-                    <a:pt x="2291920" y="705573"/>
-                  </a:lnTo>
-                  <a:lnTo>
-                    <a:pt x="2363543" y="1028372"/>
-                  </a:lnTo>
-                  <a:lnTo>
-                    <a:pt x="2435165" y="1313665"/>
-                  </a:lnTo>
-                  <a:lnTo>
-                    <a:pt x="2506788" y="1565809"/>
-                  </a:lnTo>
-                  <a:lnTo>
-                    <a:pt x="2578410" y="1788657"/>
-                  </a:lnTo>
-                  <a:lnTo>
-                    <a:pt x="2650033" y="1985611"/>
-                  </a:lnTo>
-                  <a:lnTo>
-                    <a:pt x="2721655" y="2159681"/>
-                  </a:lnTo>
-                  <a:lnTo>
-                    <a:pt x="2793278" y="2313526"/>
-                  </a:lnTo>
-                  <a:lnTo>
-                    <a:pt x="2864901" y="2449495"/>
-                  </a:lnTo>
-                  <a:lnTo>
-                    <a:pt x="2936523" y="2569666"/>
-                  </a:lnTo>
-                  <a:lnTo>
-                    <a:pt x="3008146" y="2658904"/>
-                  </a:lnTo>
-                  <a:lnTo>
-                    <a:pt x="3079768" y="2680204"/>
-                  </a:lnTo>
-                  <a:lnTo>
-                    <a:pt x="3151391" y="2700954"/>
-                  </a:lnTo>
-                  <a:lnTo>
-                    <a:pt x="3223013" y="2721168"/>
-                  </a:lnTo>
-                  <a:lnTo>
-                    <a:pt x="3294636" y="2740860"/>
-                  </a:lnTo>
-                  <a:lnTo>
-                    <a:pt x="3366258" y="2760044"/>
-                  </a:lnTo>
-                  <a:lnTo>
-                    <a:pt x="3437881" y="2778732"/>
-                  </a:lnTo>
-                  <a:lnTo>
-                    <a:pt x="3509503" y="2796938"/>
-                  </a:lnTo>
-                  <a:lnTo>
-                    <a:pt x="3581126" y="2814673"/>
-                  </a:lnTo>
-                  <a:lnTo>
-                    <a:pt x="3652748" y="2831951"/>
-                  </a:lnTo>
-                  <a:lnTo>
-                    <a:pt x="3724371" y="2848782"/>
-                  </a:lnTo>
-                  <a:lnTo>
-                    <a:pt x="3795993" y="2865179"/>
-                  </a:lnTo>
-                  <a:lnTo>
-                    <a:pt x="3867616" y="2881152"/>
-                  </a:lnTo>
-                  <a:lnTo>
-                    <a:pt x="3939238" y="2896713"/>
-                  </a:lnTo>
-                  <a:lnTo>
-                    <a:pt x="4010861" y="2911872"/>
-                  </a:lnTo>
-                  <a:lnTo>
-                    <a:pt x="4082483" y="2926640"/>
-                  </a:lnTo>
-                  <a:lnTo>
-                    <a:pt x="4154106" y="2941026"/>
-                  </a:lnTo>
-                  <a:lnTo>
-                    <a:pt x="4225729" y="2955041"/>
-                  </a:lnTo>
-                  <a:lnTo>
-                    <a:pt x="4297351" y="2968693"/>
-                  </a:lnTo>
-                  <a:lnTo>
-                    <a:pt x="4368974" y="2981994"/>
-                  </a:lnTo>
-                  <a:lnTo>
-                    <a:pt x="4440596" y="2994950"/>
-                  </a:lnTo>
-                  <a:lnTo>
-                    <a:pt x="4512219" y="3007573"/>
-                  </a:lnTo>
-                  <a:lnTo>
-                    <a:pt x="4583841" y="3019869"/>
-                  </a:lnTo>
-                  <a:lnTo>
-                    <a:pt x="4655464" y="3031848"/>
-                  </a:lnTo>
-                  <a:lnTo>
-                    <a:pt x="4727086" y="3043517"/>
-                  </a:lnTo>
-                  <a:lnTo>
-                    <a:pt x="4798709" y="3054885"/>
-                  </a:lnTo>
-                  <a:lnTo>
-                    <a:pt x="4870331" y="3065960"/>
-                  </a:lnTo>
-                  <a:lnTo>
-                    <a:pt x="4941954" y="3076748"/>
-                  </a:lnTo>
-                  <a:lnTo>
-                    <a:pt x="5013576" y="3087258"/>
-                  </a:lnTo>
-                  <a:lnTo>
-                    <a:pt x="5085199" y="3097497"/>
-                  </a:lnTo>
-                  <a:lnTo>
-                    <a:pt x="5156821" y="3107471"/>
-                  </a:lnTo>
-                  <a:lnTo>
-                    <a:pt x="5228444" y="3117188"/>
-                  </a:lnTo>
-                  <a:lnTo>
-                    <a:pt x="5300066" y="3126653"/>
-                  </a:lnTo>
-                  <a:lnTo>
-                    <a:pt x="5371689" y="3135874"/>
-                  </a:lnTo>
-                  <a:lnTo>
-                    <a:pt x="5443311" y="3144858"/>
-                  </a:lnTo>
-                  <a:lnTo>
-                    <a:pt x="5514934" y="3153609"/>
-                  </a:lnTo>
-                  <a:lnTo>
-                    <a:pt x="5586557" y="3162134"/>
-                  </a:lnTo>
-                  <a:lnTo>
-                    <a:pt x="5658179" y="3170439"/>
-                  </a:lnTo>
-                  <a:lnTo>
-                    <a:pt x="5729802" y="3178530"/>
-                  </a:lnTo>
-                  <a:lnTo>
-                    <a:pt x="5801424" y="3186411"/>
-                  </a:lnTo>
-                  <a:lnTo>
-                    <a:pt x="5873047" y="3194089"/>
-                  </a:lnTo>
-                  <a:lnTo>
-                    <a:pt x="5944669" y="3201569"/>
-                  </a:lnTo>
-                  <a:lnTo>
-                    <a:pt x="6016292" y="3208856"/>
-                  </a:lnTo>
-                  <a:lnTo>
-                    <a:pt x="6087914" y="3215954"/>
-                  </a:lnTo>
-                  <a:lnTo>
-                    <a:pt x="6159537" y="3222870"/>
-                  </a:lnTo>
-                  <a:lnTo>
-                    <a:pt x="6231159" y="3229606"/>
-                  </a:lnTo>
-                  <a:lnTo>
-                    <a:pt x="6302782" y="3236169"/>
-                  </a:lnTo>
-                  <a:lnTo>
-                    <a:pt x="6374404" y="3242562"/>
-                  </a:lnTo>
-                  <a:lnTo>
-                    <a:pt x="6446027" y="3248790"/>
-                  </a:lnTo>
-                  <a:lnTo>
-                    <a:pt x="6517649" y="3254858"/>
-                  </a:lnTo>
-                  <a:lnTo>
-                    <a:pt x="6589272" y="3260768"/>
-                  </a:lnTo>
-                  <a:lnTo>
-                    <a:pt x="6660894" y="3266526"/>
-                  </a:lnTo>
-                  <a:lnTo>
-                    <a:pt x="6732517" y="3272135"/>
-                  </a:lnTo>
-                  <a:lnTo>
-                    <a:pt x="6804139" y="3277600"/>
-                  </a:lnTo>
-                  <a:lnTo>
-                    <a:pt x="6875762" y="3282923"/>
-                  </a:lnTo>
-                  <a:lnTo>
-                    <a:pt x="6947385" y="3288109"/>
-                  </a:lnTo>
-                  <a:lnTo>
-                    <a:pt x="7019007" y="3293161"/>
-                  </a:lnTo>
-                  <a:lnTo>
-                    <a:pt x="7090630" y="3298083"/>
-                  </a:lnTo>
-                  <a:lnTo>
-                    <a:pt x="7090630" y="3483039"/>
-                  </a:lnTo>
-                  <a:lnTo>
-                    <a:pt x="7019007" y="3482946"/>
-                  </a:lnTo>
-                  <a:lnTo>
-                    <a:pt x="6947385" y="3482841"/>
-                  </a:lnTo>
-                  <a:lnTo>
-                    <a:pt x="6875762" y="3482721"/>
-                  </a:lnTo>
-                  <a:lnTo>
-                    <a:pt x="6804139" y="3482587"/>
-                  </a:lnTo>
-                  <a:lnTo>
-                    <a:pt x="6732517" y="3482434"/>
-                  </a:lnTo>
-                  <a:lnTo>
-                    <a:pt x="6660894" y="3482262"/>
-                  </a:lnTo>
-                  <a:lnTo>
-                    <a:pt x="6589272" y="3482067"/>
-                  </a:lnTo>
-                  <a:lnTo>
-                    <a:pt x="6517649" y="3481846"/>
-                  </a:lnTo>
-                  <a:lnTo>
-                    <a:pt x="6446027" y="3481596"/>
-                  </a:lnTo>
-                  <a:lnTo>
-                    <a:pt x="6374404" y="3481313"/>
-                  </a:lnTo>
-                  <a:lnTo>
-                    <a:pt x="6302782" y="3480993"/>
-                  </a:lnTo>
-                  <a:lnTo>
-                    <a:pt x="6231159" y="3480631"/>
-                  </a:lnTo>
-                  <a:lnTo>
-                    <a:pt x="6159537" y="3480222"/>
-                  </a:lnTo>
-                  <a:lnTo>
-                    <a:pt x="6087914" y="3479758"/>
-                  </a:lnTo>
-                  <a:lnTo>
-                    <a:pt x="6016292" y="3479234"/>
-                  </a:lnTo>
-                  <a:lnTo>
-                    <a:pt x="5944669" y="3478641"/>
-                  </a:lnTo>
-                  <a:lnTo>
-                    <a:pt x="5873047" y="3477970"/>
-                  </a:lnTo>
-                  <a:lnTo>
-                    <a:pt x="5801424" y="3477210"/>
-                  </a:lnTo>
-                  <a:lnTo>
-                    <a:pt x="5729802" y="3476351"/>
-                  </a:lnTo>
-                  <a:lnTo>
-                    <a:pt x="5658179" y="3475379"/>
-                  </a:lnTo>
-                  <a:lnTo>
-                    <a:pt x="5586557" y="3474279"/>
-                  </a:lnTo>
-                  <a:lnTo>
-                    <a:pt x="5514934" y="3473034"/>
-                  </a:lnTo>
-                  <a:lnTo>
-                    <a:pt x="5443311" y="3471626"/>
-                  </a:lnTo>
-                  <a:lnTo>
-                    <a:pt x="5371689" y="3470032"/>
-                  </a:lnTo>
-                  <a:lnTo>
-                    <a:pt x="5300066" y="3468229"/>
-                  </a:lnTo>
-                  <a:lnTo>
-                    <a:pt x="5228444" y="3466189"/>
-                  </a:lnTo>
-                  <a:lnTo>
-                    <a:pt x="5156821" y="3463881"/>
-                  </a:lnTo>
-                  <a:lnTo>
-                    <a:pt x="5085199" y="3461270"/>
-                  </a:lnTo>
-                  <a:lnTo>
-                    <a:pt x="5013576" y="3458315"/>
-                  </a:lnTo>
-                  <a:lnTo>
-                    <a:pt x="4941954" y="3454971"/>
-                  </a:lnTo>
-                  <a:lnTo>
-                    <a:pt x="4870331" y="3451188"/>
-                  </a:lnTo>
-                  <a:lnTo>
-                    <a:pt x="4798709" y="3446908"/>
-                  </a:lnTo>
-                  <a:lnTo>
-                    <a:pt x="4727086" y="3442065"/>
-                  </a:lnTo>
-                  <a:lnTo>
-                    <a:pt x="4655464" y="3436585"/>
-                  </a:lnTo>
-                  <a:lnTo>
-                    <a:pt x="4583841" y="3430385"/>
-                  </a:lnTo>
-                  <a:lnTo>
-                    <a:pt x="4512219" y="3423370"/>
-                  </a:lnTo>
-                  <a:lnTo>
-                    <a:pt x="4440596" y="3415433"/>
-                  </a:lnTo>
-                  <a:lnTo>
-                    <a:pt x="4368974" y="3406452"/>
-                  </a:lnTo>
-                  <a:lnTo>
-                    <a:pt x="4297351" y="3396290"/>
-                  </a:lnTo>
-                  <a:lnTo>
-                    <a:pt x="4225729" y="3384792"/>
-                  </a:lnTo>
-                  <a:lnTo>
-                    <a:pt x="4154106" y="3371783"/>
-                  </a:lnTo>
-                  <a:lnTo>
-                    <a:pt x="4082483" y="3357064"/>
-                  </a:lnTo>
-                  <a:lnTo>
-                    <a:pt x="4010861" y="3340409"/>
-                  </a:lnTo>
-                  <a:lnTo>
-                    <a:pt x="3939238" y="3321565"/>
-                  </a:lnTo>
-                  <a:lnTo>
-                    <a:pt x="3867616" y="3300244"/>
-                  </a:lnTo>
-                  <a:lnTo>
-                    <a:pt x="3795993" y="3276119"/>
-                  </a:lnTo>
-                  <a:lnTo>
-                    <a:pt x="3724371" y="3248823"/>
-                  </a:lnTo>
-                  <a:lnTo>
-                    <a:pt x="3652748" y="3217939"/>
-                  </a:lnTo>
-                  <a:lnTo>
-                    <a:pt x="3581126" y="3182994"/>
-                  </a:lnTo>
-                  <a:lnTo>
-                    <a:pt x="3509503" y="3143455"/>
-                  </a:lnTo>
-                  <a:lnTo>
-                    <a:pt x="3437881" y="3098718"/>
-                  </a:lnTo>
-                  <a:lnTo>
-                    <a:pt x="3366258" y="3048100"/>
-                  </a:lnTo>
-                  <a:lnTo>
-                    <a:pt x="3294636" y="2990827"/>
-                  </a:lnTo>
-                  <a:lnTo>
-                    <a:pt x="3223013" y="2926025"/>
-                  </a:lnTo>
-                  <a:lnTo>
-                    <a:pt x="3151391" y="2852703"/>
-                  </a:lnTo>
-                  <a:lnTo>
-                    <a:pt x="3079768" y="2769742"/>
-                  </a:lnTo>
-                  <a:lnTo>
-                    <a:pt x="3008146" y="2675874"/>
-                  </a:lnTo>
-                  <a:lnTo>
-                    <a:pt x="2936523" y="2637039"/>
-                  </a:lnTo>
-                  <a:lnTo>
-                    <a:pt x="2864901" y="2614595"/>
-                  </a:lnTo>
-                  <a:lnTo>
-                    <a:pt x="2793278" y="2591556"/>
-                  </a:lnTo>
-                  <a:lnTo>
-                    <a:pt x="2721655" y="2567906"/>
-                  </a:lnTo>
-                  <a:lnTo>
-                    <a:pt x="2650033" y="2543629"/>
-                  </a:lnTo>
-                  <a:lnTo>
-                    <a:pt x="2578410" y="2518709"/>
-                  </a:lnTo>
-                  <a:lnTo>
-                    <a:pt x="2506788" y="2493128"/>
-                  </a:lnTo>
-                  <a:lnTo>
-                    <a:pt x="2435165" y="2466870"/>
-                  </a:lnTo>
-                  <a:lnTo>
-                    <a:pt x="2363543" y="2439915"/>
-                  </a:lnTo>
-                  <a:lnTo>
-                    <a:pt x="2291920" y="2412245"/>
-                  </a:lnTo>
-                  <a:lnTo>
-                    <a:pt x="2220298" y="2383842"/>
-                  </a:lnTo>
-                  <a:lnTo>
-                    <a:pt x="2148675" y="2354686"/>
-                  </a:lnTo>
-                  <a:lnTo>
-                    <a:pt x="2077053" y="2324758"/>
-                  </a:lnTo>
-                  <a:lnTo>
-                    <a:pt x="2005430" y="2294036"/>
-                  </a:lnTo>
-                  <a:lnTo>
-                    <a:pt x="1933808" y="2262499"/>
-                  </a:lnTo>
-                  <a:lnTo>
-                    <a:pt x="1862185" y="2230127"/>
-                  </a:lnTo>
-                  <a:lnTo>
-                    <a:pt x="1790563" y="2196896"/>
-                  </a:lnTo>
-                  <a:lnTo>
-                    <a:pt x="1718940" y="2162785"/>
-                  </a:lnTo>
-                  <a:lnTo>
-                    <a:pt x="1647318" y="2127770"/>
-                  </a:lnTo>
-                  <a:lnTo>
-                    <a:pt x="1575695" y="2091826"/>
-                  </a:lnTo>
-                  <a:lnTo>
-                    <a:pt x="1504073" y="2054929"/>
-                  </a:lnTo>
-                  <a:lnTo>
-                    <a:pt x="1432450" y="2017055"/>
-                  </a:lnTo>
-                  <a:lnTo>
-                    <a:pt x="1360827" y="1978176"/>
-                  </a:lnTo>
-                  <a:lnTo>
-                    <a:pt x="1289205" y="1938267"/>
-                  </a:lnTo>
-                  <a:lnTo>
-                    <a:pt x="1217582" y="1897300"/>
-                  </a:lnTo>
-                  <a:lnTo>
-                    <a:pt x="1145960" y="1855248"/>
-                  </a:lnTo>
-                  <a:lnTo>
-                    <a:pt x="1074337" y="1812080"/>
-                  </a:lnTo>
-                  <a:lnTo>
-                    <a:pt x="1002715" y="1767768"/>
-                  </a:lnTo>
-                  <a:lnTo>
-                    <a:pt x="931092" y="1722282"/>
-                  </a:lnTo>
-                  <a:lnTo>
-                    <a:pt x="859470" y="1675589"/>
-                  </a:lnTo>
-                  <a:lnTo>
-                    <a:pt x="787847" y="1627659"/>
-                  </a:lnTo>
-                  <a:lnTo>
-                    <a:pt x="716225" y="1578459"/>
-                  </a:lnTo>
-                  <a:lnTo>
-                    <a:pt x="644602" y="1527954"/>
-                  </a:lnTo>
-                  <a:lnTo>
-                    <a:pt x="572980" y="1476111"/>
-                  </a:lnTo>
-                  <a:lnTo>
-                    <a:pt x="501357" y="1422894"/>
-                  </a:lnTo>
-                  <a:lnTo>
-                    <a:pt x="429735" y="1368265"/>
-                  </a:lnTo>
-                  <a:lnTo>
-                    <a:pt x="358112" y="1312189"/>
-                  </a:lnTo>
-                  <a:lnTo>
-                    <a:pt x="286490" y="1254626"/>
-                  </a:lnTo>
-                  <a:lnTo>
-                    <a:pt x="214867" y="1195537"/>
-                  </a:lnTo>
-                  <a:lnTo>
-                    <a:pt x="143245" y="1134883"/>
-                  </a:lnTo>
-                  <a:lnTo>
-                    <a:pt x="71622" y="1072620"/>
-                  </a:lnTo>
-                  <a:lnTo>
-                    <a:pt x="0" y="1008707"/>
+                    <a:pt x="2220298" y="105282"/>
+                  </a:lnTo>
+                  <a:lnTo>
+                    <a:pt x="2291920" y="515108"/>
+                  </a:lnTo>
+                  <a:lnTo>
+                    <a:pt x="2363543" y="875220"/>
+                  </a:lnTo>
+                  <a:lnTo>
+                    <a:pt x="2435165" y="1191648"/>
+                  </a:lnTo>
+                  <a:lnTo>
+                    <a:pt x="2506788" y="1469692"/>
+                  </a:lnTo>
+                  <a:lnTo>
+                    <a:pt x="2578410" y="1714007"/>
+                  </a:lnTo>
+                  <a:lnTo>
+                    <a:pt x="2650033" y="1928686"/>
+                  </a:lnTo>
+                  <a:lnTo>
+                    <a:pt x="2721655" y="2117323"/>
+                  </a:lnTo>
+                  <a:lnTo>
+                    <a:pt x="2793278" y="2283078"/>
+                  </a:lnTo>
+                  <a:lnTo>
+                    <a:pt x="2864901" y="2428725"/>
+                  </a:lnTo>
+                  <a:lnTo>
+                    <a:pt x="2936523" y="2556705"/>
+                  </a:lnTo>
+                  <a:lnTo>
+                    <a:pt x="3008146" y="2657383"/>
+                  </a:lnTo>
+                  <a:lnTo>
+                    <a:pt x="3079768" y="2679197"/>
+                  </a:lnTo>
+                  <a:lnTo>
+                    <a:pt x="3151391" y="2700436"/>
+                  </a:lnTo>
+                  <a:lnTo>
+                    <a:pt x="3223013" y="2721114"/>
+                  </a:lnTo>
+                  <a:lnTo>
+                    <a:pt x="3294636" y="2741246"/>
+                  </a:lnTo>
+                  <a:lnTo>
+                    <a:pt x="3366258" y="2760846"/>
+                  </a:lnTo>
+                  <a:lnTo>
+                    <a:pt x="3437881" y="2779930"/>
+                  </a:lnTo>
+                  <a:lnTo>
+                    <a:pt x="3509503" y="2798509"/>
+                  </a:lnTo>
+                  <a:lnTo>
+                    <a:pt x="3581126" y="2816598"/>
+                  </a:lnTo>
+                  <a:lnTo>
+                    <a:pt x="3652748" y="2834209"/>
+                  </a:lnTo>
+                  <a:lnTo>
+                    <a:pt x="3724371" y="2851356"/>
+                  </a:lnTo>
+                  <a:lnTo>
+                    <a:pt x="3795993" y="2868050"/>
+                  </a:lnTo>
+                  <a:lnTo>
+                    <a:pt x="3867616" y="2884303"/>
+                  </a:lnTo>
+                  <a:lnTo>
+                    <a:pt x="3939238" y="2900127"/>
+                  </a:lnTo>
+                  <a:lnTo>
+                    <a:pt x="4010861" y="2915534"/>
+                  </a:lnTo>
+                  <a:lnTo>
+                    <a:pt x="4082483" y="2930533"/>
+                  </a:lnTo>
+                  <a:lnTo>
+                    <a:pt x="4154106" y="2945137"/>
+                  </a:lnTo>
+                  <a:lnTo>
+                    <a:pt x="4225729" y="2959355"/>
+                  </a:lnTo>
+                  <a:lnTo>
+                    <a:pt x="4297351" y="2973198"/>
+                  </a:lnTo>
+                  <a:lnTo>
+                    <a:pt x="4368974" y="2986676"/>
+                  </a:lnTo>
+                  <a:lnTo>
+                    <a:pt x="4440596" y="2999798"/>
+                  </a:lnTo>
+                  <a:lnTo>
+                    <a:pt x="4512219" y="3012573"/>
+                  </a:lnTo>
+                  <a:lnTo>
+                    <a:pt x="4583841" y="3025011"/>
+                  </a:lnTo>
+                  <a:lnTo>
+                    <a:pt x="4655464" y="3037121"/>
+                  </a:lnTo>
+                  <a:lnTo>
+                    <a:pt x="4727086" y="3048911"/>
+                  </a:lnTo>
+                  <a:lnTo>
+                    <a:pt x="4798709" y="3060390"/>
+                  </a:lnTo>
+                  <a:lnTo>
+                    <a:pt x="4870331" y="3071565"/>
+                  </a:lnTo>
+                  <a:lnTo>
+                    <a:pt x="4941954" y="3082446"/>
+                  </a:lnTo>
+                  <a:lnTo>
+                    <a:pt x="5013576" y="3093040"/>
+                  </a:lnTo>
+                  <a:lnTo>
+                    <a:pt x="5085199" y="3103354"/>
+                  </a:lnTo>
+                  <a:lnTo>
+                    <a:pt x="5156821" y="3113395"/>
+                  </a:lnTo>
+                  <a:lnTo>
+                    <a:pt x="5228444" y="3123172"/>
+                  </a:lnTo>
+                  <a:lnTo>
+                    <a:pt x="5300066" y="3132690"/>
+                  </a:lnTo>
+                  <a:lnTo>
+                    <a:pt x="5371689" y="3141958"/>
+                  </a:lnTo>
+                  <a:lnTo>
+                    <a:pt x="5443311" y="3150980"/>
+                  </a:lnTo>
+                  <a:lnTo>
+                    <a:pt x="5514934" y="3159765"/>
+                  </a:lnTo>
+                  <a:lnTo>
+                    <a:pt x="5586557" y="3168317"/>
+                  </a:lnTo>
+                  <a:lnTo>
+                    <a:pt x="5658179" y="3176644"/>
+                  </a:lnTo>
+                  <a:lnTo>
+                    <a:pt x="5729802" y="3184751"/>
+                  </a:lnTo>
+                  <a:lnTo>
+                    <a:pt x="5801424" y="3192644"/>
+                  </a:lnTo>
+                  <a:lnTo>
+                    <a:pt x="5873047" y="3200328"/>
+                  </a:lnTo>
+                  <a:lnTo>
+                    <a:pt x="5944669" y="3207810"/>
+                  </a:lnTo>
+                  <a:lnTo>
+                    <a:pt x="6016292" y="3215094"/>
+                  </a:lnTo>
+                  <a:lnTo>
+                    <a:pt x="6087914" y="3222186"/>
+                  </a:lnTo>
+                  <a:lnTo>
+                    <a:pt x="6159537" y="3229091"/>
+                  </a:lnTo>
+                  <a:lnTo>
+                    <a:pt x="6231159" y="3235813"/>
+                  </a:lnTo>
+                  <a:lnTo>
+                    <a:pt x="6302782" y="3242358"/>
+                  </a:lnTo>
+                  <a:lnTo>
+                    <a:pt x="6374404" y="3248730"/>
+                  </a:lnTo>
+                  <a:lnTo>
+                    <a:pt x="6446027" y="3254934"/>
+                  </a:lnTo>
+                  <a:lnTo>
+                    <a:pt x="6517649" y="3260974"/>
+                  </a:lnTo>
+                  <a:lnTo>
+                    <a:pt x="6589272" y="3266855"/>
+                  </a:lnTo>
+                  <a:lnTo>
+                    <a:pt x="6660894" y="3272581"/>
+                  </a:lnTo>
+                  <a:lnTo>
+                    <a:pt x="6732517" y="3278155"/>
+                  </a:lnTo>
+                  <a:lnTo>
+                    <a:pt x="6804139" y="3283582"/>
+                  </a:lnTo>
+                  <a:lnTo>
+                    <a:pt x="6875762" y="3288866"/>
+                  </a:lnTo>
+                  <a:lnTo>
+                    <a:pt x="6947385" y="3294011"/>
+                  </a:lnTo>
+                  <a:lnTo>
+                    <a:pt x="7019007" y="3299019"/>
+                  </a:lnTo>
+                  <a:lnTo>
+                    <a:pt x="7090630" y="3303896"/>
+                  </a:lnTo>
+                  <a:lnTo>
+                    <a:pt x="7090630" y="3483234"/>
+                  </a:lnTo>
+                  <a:lnTo>
+                    <a:pt x="7019007" y="3483163"/>
+                  </a:lnTo>
+                  <a:lnTo>
+                    <a:pt x="6947385" y="3483083"/>
+                  </a:lnTo>
+                  <a:lnTo>
+                    <a:pt x="6875762" y="3482991"/>
+                  </a:lnTo>
+                  <a:lnTo>
+                    <a:pt x="6804139" y="3482887"/>
+                  </a:lnTo>
+                  <a:lnTo>
+                    <a:pt x="6732517" y="3482768"/>
+                  </a:lnTo>
+                  <a:lnTo>
+                    <a:pt x="6660894" y="3482633"/>
+                  </a:lnTo>
+                  <a:lnTo>
+                    <a:pt x="6589272" y="3482479"/>
+                  </a:lnTo>
+                  <a:lnTo>
+                    <a:pt x="6517649" y="3482304"/>
+                  </a:lnTo>
+                  <a:lnTo>
+                    <a:pt x="6446027" y="3482105"/>
+                  </a:lnTo>
+                  <a:lnTo>
+                    <a:pt x="6374404" y="3481879"/>
+                  </a:lnTo>
+                  <a:lnTo>
+                    <a:pt x="6302782" y="3481621"/>
+                  </a:lnTo>
+                  <a:lnTo>
+                    <a:pt x="6231159" y="3481327"/>
+                  </a:lnTo>
+                  <a:lnTo>
+                    <a:pt x="6159537" y="3480993"/>
+                  </a:lnTo>
+                  <a:lnTo>
+                    <a:pt x="6087914" y="3480613"/>
+                  </a:lnTo>
+                  <a:lnTo>
+                    <a:pt x="6016292" y="3480181"/>
+                  </a:lnTo>
+                  <a:lnTo>
+                    <a:pt x="5944669" y="3479689"/>
+                  </a:lnTo>
+                  <a:lnTo>
+                    <a:pt x="5873047" y="3479128"/>
+                  </a:lnTo>
+                  <a:lnTo>
+                    <a:pt x="5801424" y="3478491"/>
+                  </a:lnTo>
+                  <a:lnTo>
+                    <a:pt x="5729802" y="3477765"/>
+                  </a:lnTo>
+                  <a:lnTo>
+                    <a:pt x="5658179" y="3476940"/>
+                  </a:lnTo>
+                  <a:lnTo>
+                    <a:pt x="5586557" y="3476000"/>
+                  </a:lnTo>
+                  <a:lnTo>
+                    <a:pt x="5514934" y="3474931"/>
+                  </a:lnTo>
+                  <a:lnTo>
+                    <a:pt x="5443311" y="3473713"/>
+                  </a:lnTo>
+                  <a:lnTo>
+                    <a:pt x="5371689" y="3472328"/>
+                  </a:lnTo>
+                  <a:lnTo>
+                    <a:pt x="5300066" y="3470752"/>
+                  </a:lnTo>
+                  <a:lnTo>
+                    <a:pt x="5228444" y="3468958"/>
+                  </a:lnTo>
+                  <a:lnTo>
+                    <a:pt x="5156821" y="3466917"/>
+                  </a:lnTo>
+                  <a:lnTo>
+                    <a:pt x="5085199" y="3464593"/>
+                  </a:lnTo>
+                  <a:lnTo>
+                    <a:pt x="5013576" y="3461949"/>
+                  </a:lnTo>
+                  <a:lnTo>
+                    <a:pt x="4941954" y="3458940"/>
+                  </a:lnTo>
+                  <a:lnTo>
+                    <a:pt x="4870331" y="3455516"/>
+                  </a:lnTo>
+                  <a:lnTo>
+                    <a:pt x="4798709" y="3451618"/>
+                  </a:lnTo>
+                  <a:lnTo>
+                    <a:pt x="4727086" y="3447183"/>
+                  </a:lnTo>
+                  <a:lnTo>
+                    <a:pt x="4655464" y="3442135"/>
+                  </a:lnTo>
+                  <a:lnTo>
+                    <a:pt x="4583841" y="3436391"/>
+                  </a:lnTo>
+                  <a:lnTo>
+                    <a:pt x="4512219" y="3429853"/>
+                  </a:lnTo>
+                  <a:lnTo>
+                    <a:pt x="4440596" y="3422413"/>
+                  </a:lnTo>
+                  <a:lnTo>
+                    <a:pt x="4368974" y="3413946"/>
+                  </a:lnTo>
+                  <a:lnTo>
+                    <a:pt x="4297351" y="3404310"/>
+                  </a:lnTo>
+                  <a:lnTo>
+                    <a:pt x="4225729" y="3393343"/>
+                  </a:lnTo>
+                  <a:lnTo>
+                    <a:pt x="4154106" y="3380863"/>
+                  </a:lnTo>
+                  <a:lnTo>
+                    <a:pt x="4082483" y="3366660"/>
+                  </a:lnTo>
+                  <a:lnTo>
+                    <a:pt x="4010861" y="3350496"/>
+                  </a:lnTo>
+                  <a:lnTo>
+                    <a:pt x="3939238" y="3332100"/>
+                  </a:lnTo>
+                  <a:lnTo>
+                    <a:pt x="3867616" y="3311166"/>
+                  </a:lnTo>
+                  <a:lnTo>
+                    <a:pt x="3795993" y="3287340"/>
+                  </a:lnTo>
+                  <a:lnTo>
+                    <a:pt x="3724371" y="3260226"/>
+                  </a:lnTo>
+                  <a:lnTo>
+                    <a:pt x="3652748" y="3229369"/>
+                  </a:lnTo>
+                  <a:lnTo>
+                    <a:pt x="3581126" y="3194252"/>
+                  </a:lnTo>
+                  <a:lnTo>
+                    <a:pt x="3509503" y="3154286"/>
+                  </a:lnTo>
+                  <a:lnTo>
+                    <a:pt x="3437881" y="3108804"/>
+                  </a:lnTo>
+                  <a:lnTo>
+                    <a:pt x="3366258" y="3057042"/>
+                  </a:lnTo>
+                  <a:lnTo>
+                    <a:pt x="3294636" y="2998135"/>
+                  </a:lnTo>
+                  <a:lnTo>
+                    <a:pt x="3223013" y="2931095"/>
+                  </a:lnTo>
+                  <a:lnTo>
+                    <a:pt x="3151391" y="2854801"/>
+                  </a:lnTo>
+                  <a:lnTo>
+                    <a:pt x="3079768" y="2767974"/>
+                  </a:lnTo>
+                  <a:lnTo>
+                    <a:pt x="3008146" y="2669160"/>
+                  </a:lnTo>
+                  <a:lnTo>
+                    <a:pt x="2936523" y="2634977"/>
+                  </a:lnTo>
+                  <a:lnTo>
+                    <a:pt x="2864901" y="2611963"/>
+                  </a:lnTo>
+                  <a:lnTo>
+                    <a:pt x="2793278" y="2588326"/>
+                  </a:lnTo>
+                  <a:lnTo>
+                    <a:pt x="2721655" y="2564048"/>
+                  </a:lnTo>
+                  <a:lnTo>
+                    <a:pt x="2650033" y="2539111"/>
+                  </a:lnTo>
+                  <a:lnTo>
+                    <a:pt x="2578410" y="2513498"/>
+                  </a:lnTo>
+                  <a:lnTo>
+                    <a:pt x="2506788" y="2487191"/>
+                  </a:lnTo>
+                  <a:lnTo>
+                    <a:pt x="2435165" y="2460171"/>
+                  </a:lnTo>
+                  <a:lnTo>
+                    <a:pt x="2363543" y="2432418"/>
+                  </a:lnTo>
+                  <a:lnTo>
+                    <a:pt x="2291920" y="2403912"/>
+                  </a:lnTo>
+                  <a:lnTo>
+                    <a:pt x="2220298" y="2374634"/>
+                  </a:lnTo>
+                  <a:lnTo>
+                    <a:pt x="2148675" y="2344561"/>
+                  </a:lnTo>
+                  <a:lnTo>
+                    <a:pt x="2077053" y="2313674"/>
+                  </a:lnTo>
+                  <a:lnTo>
+                    <a:pt x="2005430" y="2281949"/>
+                  </a:lnTo>
+                  <a:lnTo>
+                    <a:pt x="1933808" y="2249363"/>
+                  </a:lnTo>
+                  <a:lnTo>
+                    <a:pt x="1862185" y="2215894"/>
+                  </a:lnTo>
+                  <a:lnTo>
+                    <a:pt x="1790563" y="2181518"/>
+                  </a:lnTo>
+                  <a:lnTo>
+                    <a:pt x="1718940" y="2146210"/>
+                  </a:lnTo>
+                  <a:lnTo>
+                    <a:pt x="1647318" y="2109944"/>
+                  </a:lnTo>
+                  <a:lnTo>
+                    <a:pt x="1575695" y="2072695"/>
+                  </a:lnTo>
+                  <a:lnTo>
+                    <a:pt x="1504073" y="2034436"/>
+                  </a:lnTo>
+                  <a:lnTo>
+                    <a:pt x="1432450" y="1995139"/>
+                  </a:lnTo>
+                  <a:lnTo>
+                    <a:pt x="1360827" y="1954777"/>
+                  </a:lnTo>
+                  <a:lnTo>
+                    <a:pt x="1289205" y="1913321"/>
+                  </a:lnTo>
+                  <a:lnTo>
+                    <a:pt x="1217582" y="1870741"/>
+                  </a:lnTo>
+                  <a:lnTo>
+                    <a:pt x="1145960" y="1827006"/>
+                  </a:lnTo>
+                  <a:lnTo>
+                    <a:pt x="1074337" y="1782085"/>
+                  </a:lnTo>
+                  <a:lnTo>
+                    <a:pt x="1002715" y="1735947"/>
+                  </a:lnTo>
+                  <a:lnTo>
+                    <a:pt x="931092" y="1688557"/>
+                  </a:lnTo>
+                  <a:lnTo>
+                    <a:pt x="859470" y="1639883"/>
+                  </a:lnTo>
+                  <a:lnTo>
+                    <a:pt x="787847" y="1589889"/>
+                  </a:lnTo>
+                  <a:lnTo>
+                    <a:pt x="716225" y="1538539"/>
+                  </a:lnTo>
+                  <a:lnTo>
+                    <a:pt x="644602" y="1485797"/>
+                  </a:lnTo>
+                  <a:lnTo>
+                    <a:pt x="572980" y="1431625"/>
+                  </a:lnTo>
+                  <a:lnTo>
+                    <a:pt x="501357" y="1375984"/>
+                  </a:lnTo>
+                  <a:lnTo>
+                    <a:pt x="429735" y="1318834"/>
+                  </a:lnTo>
+                  <a:lnTo>
+                    <a:pt x="358112" y="1260135"/>
+                  </a:lnTo>
+                  <a:lnTo>
+                    <a:pt x="286490" y="1199844"/>
+                  </a:lnTo>
+                  <a:lnTo>
+                    <a:pt x="214867" y="1137919"/>
+                  </a:lnTo>
+                  <a:lnTo>
+                    <a:pt x="143245" y="1074314"/>
+                  </a:lnTo>
+                  <a:lnTo>
+                    <a:pt x="71622" y="1008985"/>
+                  </a:lnTo>
+                  <a:lnTo>
+                    <a:pt x="0" y="941885"/>
                   </a:lnTo>
                   <a:lnTo>
                     <a:pt x="0" y="0"/>
@@ -3933,222 +3933,222 @@
           </p:nvSpPr>
           <p:spPr>
             <a:xfrm>
-              <a:off x="3333362" y="2073503"/>
-              <a:ext cx="4929316" cy="3298083"/>
+              <a:off x="3376180" y="2073503"/>
+              <a:ext cx="4886499" cy="3303896"/>
             </a:xfrm>
             <a:custGeom>
               <a:avLst/>
               <a:pathLst>
-                <a:path w="4929316" h="3298083">
+                <a:path w="4886499" h="3303896">
                   <a:moveTo>
                     <a:pt x="0" y="0"/>
                   </a:moveTo>
                   <a:lnTo>
-                    <a:pt x="58985" y="340336"/>
-                  </a:lnTo>
-                  <a:lnTo>
-                    <a:pt x="130607" y="705573"/>
-                  </a:lnTo>
-                  <a:lnTo>
-                    <a:pt x="202230" y="1028372"/>
-                  </a:lnTo>
-                  <a:lnTo>
-                    <a:pt x="273852" y="1313665"/>
-                  </a:lnTo>
-                  <a:lnTo>
-                    <a:pt x="345475" y="1565809"/>
-                  </a:lnTo>
-                  <a:lnTo>
-                    <a:pt x="417097" y="1788657"/>
-                  </a:lnTo>
-                  <a:lnTo>
-                    <a:pt x="488720" y="1985611"/>
-                  </a:lnTo>
-                  <a:lnTo>
-                    <a:pt x="560342" y="2159681"/>
-                  </a:lnTo>
-                  <a:lnTo>
-                    <a:pt x="631965" y="2313526"/>
-                  </a:lnTo>
-                  <a:lnTo>
-                    <a:pt x="703587" y="2449495"/>
-                  </a:lnTo>
-                  <a:lnTo>
-                    <a:pt x="775210" y="2569666"/>
-                  </a:lnTo>
-                  <a:lnTo>
-                    <a:pt x="846832" y="2658904"/>
-                  </a:lnTo>
-                  <a:lnTo>
-                    <a:pt x="918455" y="2680204"/>
-                  </a:lnTo>
-                  <a:lnTo>
-                    <a:pt x="990077" y="2700954"/>
-                  </a:lnTo>
-                  <a:lnTo>
-                    <a:pt x="1061700" y="2721168"/>
-                  </a:lnTo>
-                  <a:lnTo>
-                    <a:pt x="1133322" y="2740860"/>
-                  </a:lnTo>
-                  <a:lnTo>
-                    <a:pt x="1204945" y="2760044"/>
-                  </a:lnTo>
-                  <a:lnTo>
-                    <a:pt x="1276568" y="2778732"/>
-                  </a:lnTo>
-                  <a:lnTo>
-                    <a:pt x="1348190" y="2796938"/>
-                  </a:lnTo>
-                  <a:lnTo>
-                    <a:pt x="1419813" y="2814673"/>
-                  </a:lnTo>
-                  <a:lnTo>
-                    <a:pt x="1491435" y="2831951"/>
-                  </a:lnTo>
-                  <a:lnTo>
-                    <a:pt x="1563058" y="2848782"/>
-                  </a:lnTo>
-                  <a:lnTo>
-                    <a:pt x="1634680" y="2865179"/>
-                  </a:lnTo>
-                  <a:lnTo>
-                    <a:pt x="1706303" y="2881152"/>
-                  </a:lnTo>
-                  <a:lnTo>
-                    <a:pt x="1777925" y="2896713"/>
-                  </a:lnTo>
-                  <a:lnTo>
-                    <a:pt x="1849548" y="2911872"/>
-                  </a:lnTo>
-                  <a:lnTo>
-                    <a:pt x="1921170" y="2926640"/>
-                  </a:lnTo>
-                  <a:lnTo>
-                    <a:pt x="1992793" y="2941026"/>
-                  </a:lnTo>
-                  <a:lnTo>
-                    <a:pt x="2064415" y="2955041"/>
-                  </a:lnTo>
-                  <a:lnTo>
-                    <a:pt x="2136038" y="2968693"/>
-                  </a:lnTo>
-                  <a:lnTo>
-                    <a:pt x="2207660" y="2981994"/>
-                  </a:lnTo>
-                  <a:lnTo>
-                    <a:pt x="2279283" y="2994950"/>
-                  </a:lnTo>
-                  <a:lnTo>
-                    <a:pt x="2350905" y="3007573"/>
-                  </a:lnTo>
-                  <a:lnTo>
-                    <a:pt x="2422528" y="3019869"/>
-                  </a:lnTo>
-                  <a:lnTo>
-                    <a:pt x="2494150" y="3031848"/>
-                  </a:lnTo>
-                  <a:lnTo>
-                    <a:pt x="2565773" y="3043517"/>
-                  </a:lnTo>
-                  <a:lnTo>
-                    <a:pt x="2637396" y="3054885"/>
-                  </a:lnTo>
-                  <a:lnTo>
-                    <a:pt x="2709018" y="3065960"/>
-                  </a:lnTo>
-                  <a:lnTo>
-                    <a:pt x="2780641" y="3076748"/>
-                  </a:lnTo>
-                  <a:lnTo>
-                    <a:pt x="2852263" y="3087258"/>
-                  </a:lnTo>
-                  <a:lnTo>
-                    <a:pt x="2923886" y="3097497"/>
-                  </a:lnTo>
-                  <a:lnTo>
-                    <a:pt x="2995508" y="3107471"/>
-                  </a:lnTo>
-                  <a:lnTo>
-                    <a:pt x="3067131" y="3117188"/>
-                  </a:lnTo>
-                  <a:lnTo>
-                    <a:pt x="3138753" y="3126653"/>
-                  </a:lnTo>
-                  <a:lnTo>
-                    <a:pt x="3210376" y="3135874"/>
-                  </a:lnTo>
-                  <a:lnTo>
-                    <a:pt x="3281998" y="3144858"/>
-                  </a:lnTo>
-                  <a:lnTo>
-                    <a:pt x="3353621" y="3153609"/>
-                  </a:lnTo>
-                  <a:lnTo>
-                    <a:pt x="3425243" y="3162134"/>
-                  </a:lnTo>
-                  <a:lnTo>
-                    <a:pt x="3496866" y="3170439"/>
-                  </a:lnTo>
-                  <a:lnTo>
-                    <a:pt x="3568488" y="3178530"/>
-                  </a:lnTo>
-                  <a:lnTo>
-                    <a:pt x="3640111" y="3186411"/>
-                  </a:lnTo>
-                  <a:lnTo>
-                    <a:pt x="3711733" y="3194089"/>
-                  </a:lnTo>
-                  <a:lnTo>
-                    <a:pt x="3783356" y="3201569"/>
-                  </a:lnTo>
-                  <a:lnTo>
-                    <a:pt x="3854978" y="3208856"/>
-                  </a:lnTo>
-                  <a:lnTo>
-                    <a:pt x="3926601" y="3215954"/>
-                  </a:lnTo>
-                  <a:lnTo>
-                    <a:pt x="3998224" y="3222870"/>
-                  </a:lnTo>
-                  <a:lnTo>
-                    <a:pt x="4069846" y="3229606"/>
-                  </a:lnTo>
-                  <a:lnTo>
-                    <a:pt x="4141469" y="3236169"/>
-                  </a:lnTo>
-                  <a:lnTo>
-                    <a:pt x="4213091" y="3242562"/>
-                  </a:lnTo>
-                  <a:lnTo>
-                    <a:pt x="4284714" y="3248790"/>
-                  </a:lnTo>
-                  <a:lnTo>
-                    <a:pt x="4356336" y="3254858"/>
-                  </a:lnTo>
-                  <a:lnTo>
-                    <a:pt x="4427959" y="3260768"/>
-                  </a:lnTo>
-                  <a:lnTo>
-                    <a:pt x="4499581" y="3266526"/>
-                  </a:lnTo>
-                  <a:lnTo>
-                    <a:pt x="4571204" y="3272135"/>
-                  </a:lnTo>
-                  <a:lnTo>
-                    <a:pt x="4642826" y="3277600"/>
-                  </a:lnTo>
-                  <a:lnTo>
-                    <a:pt x="4714449" y="3282923"/>
-                  </a:lnTo>
-                  <a:lnTo>
-                    <a:pt x="4786071" y="3288109"/>
-                  </a:lnTo>
-                  <a:lnTo>
-                    <a:pt x="4857694" y="3293161"/>
-                  </a:lnTo>
-                  <a:lnTo>
-                    <a:pt x="4929316" y="3298083"/>
+                    <a:pt x="16167" y="105282"/>
+                  </a:lnTo>
+                  <a:lnTo>
+                    <a:pt x="87790" y="515108"/>
+                  </a:lnTo>
+                  <a:lnTo>
+                    <a:pt x="159412" y="875220"/>
+                  </a:lnTo>
+                  <a:lnTo>
+                    <a:pt x="231035" y="1191648"/>
+                  </a:lnTo>
+                  <a:lnTo>
+                    <a:pt x="302657" y="1469692"/>
+                  </a:lnTo>
+                  <a:lnTo>
+                    <a:pt x="374280" y="1714007"/>
+                  </a:lnTo>
+                  <a:lnTo>
+                    <a:pt x="445902" y="1928686"/>
+                  </a:lnTo>
+                  <a:lnTo>
+                    <a:pt x="517525" y="2117323"/>
+                  </a:lnTo>
+                  <a:lnTo>
+                    <a:pt x="589147" y="2283078"/>
+                  </a:lnTo>
+                  <a:lnTo>
+                    <a:pt x="660770" y="2428725"/>
+                  </a:lnTo>
+                  <a:lnTo>
+                    <a:pt x="732392" y="2556705"/>
+                  </a:lnTo>
+                  <a:lnTo>
+                    <a:pt x="804015" y="2657383"/>
+                  </a:lnTo>
+                  <a:lnTo>
+                    <a:pt x="875637" y="2679197"/>
+                  </a:lnTo>
+                  <a:lnTo>
+                    <a:pt x="947260" y="2700436"/>
+                  </a:lnTo>
+                  <a:lnTo>
+                    <a:pt x="1018882" y="2721114"/>
+                  </a:lnTo>
+                  <a:lnTo>
+                    <a:pt x="1090505" y="2741246"/>
+                  </a:lnTo>
+                  <a:lnTo>
+                    <a:pt x="1162127" y="2760846"/>
+                  </a:lnTo>
+                  <a:lnTo>
+                    <a:pt x="1233750" y="2779930"/>
+                  </a:lnTo>
+                  <a:lnTo>
+                    <a:pt x="1305373" y="2798509"/>
+                  </a:lnTo>
+                  <a:lnTo>
+                    <a:pt x="1376995" y="2816598"/>
+                  </a:lnTo>
+                  <a:lnTo>
+                    <a:pt x="1448618" y="2834209"/>
+                  </a:lnTo>
+                  <a:lnTo>
+                    <a:pt x="1520240" y="2851356"/>
+                  </a:lnTo>
+                  <a:lnTo>
+                    <a:pt x="1591863" y="2868050"/>
+                  </a:lnTo>
+                  <a:lnTo>
+                    <a:pt x="1663485" y="2884303"/>
+                  </a:lnTo>
+                  <a:lnTo>
+                    <a:pt x="1735108" y="2900127"/>
+                  </a:lnTo>
+                  <a:lnTo>
+                    <a:pt x="1806730" y="2915534"/>
+                  </a:lnTo>
+                  <a:lnTo>
+                    <a:pt x="1878353" y="2930533"/>
+                  </a:lnTo>
+                  <a:lnTo>
+                    <a:pt x="1949975" y="2945137"/>
+                  </a:lnTo>
+                  <a:lnTo>
+                    <a:pt x="2021598" y="2959355"/>
+                  </a:lnTo>
+                  <a:lnTo>
+                    <a:pt x="2093220" y="2973198"/>
+                  </a:lnTo>
+                  <a:lnTo>
+                    <a:pt x="2164843" y="2986676"/>
+                  </a:lnTo>
+                  <a:lnTo>
+                    <a:pt x="2236465" y="2999798"/>
+                  </a:lnTo>
+                  <a:lnTo>
+                    <a:pt x="2308088" y="3012573"/>
+                  </a:lnTo>
+                  <a:lnTo>
+                    <a:pt x="2379710" y="3025011"/>
+                  </a:lnTo>
+                  <a:lnTo>
+                    <a:pt x="2451333" y="3037121"/>
+                  </a:lnTo>
+                  <a:lnTo>
+                    <a:pt x="2522955" y="3048911"/>
+                  </a:lnTo>
+                  <a:lnTo>
+                    <a:pt x="2594578" y="3060390"/>
+                  </a:lnTo>
+                  <a:lnTo>
+                    <a:pt x="2666201" y="3071565"/>
+                  </a:lnTo>
+                  <a:lnTo>
+                    <a:pt x="2737823" y="3082446"/>
+                  </a:lnTo>
+                  <a:lnTo>
+                    <a:pt x="2809446" y="3093040"/>
+                  </a:lnTo>
+                  <a:lnTo>
+                    <a:pt x="2881068" y="3103354"/>
+                  </a:lnTo>
+                  <a:lnTo>
+                    <a:pt x="2952691" y="3113395"/>
+                  </a:lnTo>
+                  <a:lnTo>
+                    <a:pt x="3024313" y="3123172"/>
+                  </a:lnTo>
+                  <a:lnTo>
+                    <a:pt x="3095936" y="3132690"/>
+                  </a:lnTo>
+                  <a:lnTo>
+                    <a:pt x="3167558" y="3141958"/>
+                  </a:lnTo>
+                  <a:lnTo>
+                    <a:pt x="3239181" y="3150980"/>
+                  </a:lnTo>
+                  <a:lnTo>
+                    <a:pt x="3310803" y="3159765"/>
+                  </a:lnTo>
+                  <a:lnTo>
+                    <a:pt x="3382426" y="3168317"/>
+                  </a:lnTo>
+                  <a:lnTo>
+                    <a:pt x="3454048" y="3176644"/>
+                  </a:lnTo>
+                  <a:lnTo>
+                    <a:pt x="3525671" y="3184751"/>
+                  </a:lnTo>
+                  <a:lnTo>
+                    <a:pt x="3597293" y="3192644"/>
+                  </a:lnTo>
+                  <a:lnTo>
+                    <a:pt x="3668916" y="3200328"/>
+                  </a:lnTo>
+                  <a:lnTo>
+                    <a:pt x="3740538" y="3207810"/>
+                  </a:lnTo>
+                  <a:lnTo>
+                    <a:pt x="3812161" y="3215094"/>
+                  </a:lnTo>
+                  <a:lnTo>
+                    <a:pt x="3883783" y="3222186"/>
+                  </a:lnTo>
+                  <a:lnTo>
+                    <a:pt x="3955406" y="3229091"/>
+                  </a:lnTo>
+                  <a:lnTo>
+                    <a:pt x="4027029" y="3235813"/>
+                  </a:lnTo>
+                  <a:lnTo>
+                    <a:pt x="4098651" y="3242358"/>
+                  </a:lnTo>
+                  <a:lnTo>
+                    <a:pt x="4170274" y="3248730"/>
+                  </a:lnTo>
+                  <a:lnTo>
+                    <a:pt x="4241896" y="3254934"/>
+                  </a:lnTo>
+                  <a:lnTo>
+                    <a:pt x="4313519" y="3260974"/>
+                  </a:lnTo>
+                  <a:lnTo>
+                    <a:pt x="4385141" y="3266855"/>
+                  </a:lnTo>
+                  <a:lnTo>
+                    <a:pt x="4456764" y="3272581"/>
+                  </a:lnTo>
+                  <a:lnTo>
+                    <a:pt x="4528386" y="3278155"/>
+                  </a:lnTo>
+                  <a:lnTo>
+                    <a:pt x="4600009" y="3283582"/>
+                  </a:lnTo>
+                  <a:lnTo>
+                    <a:pt x="4671631" y="3288866"/>
+                  </a:lnTo>
+                  <a:lnTo>
+                    <a:pt x="4743254" y="3294011"/>
+                  </a:lnTo>
+                  <a:lnTo>
+                    <a:pt x="4814876" y="3299019"/>
+                  </a:lnTo>
+                  <a:lnTo>
+                    <a:pt x="4886499" y="3303896"/>
                   </a:lnTo>
                 </a:path>
               </a:pathLst>
@@ -4168,309 +4168,309 @@
           </p:nvSpPr>
           <p:spPr>
             <a:xfrm>
-              <a:off x="1172049" y="3082210"/>
-              <a:ext cx="7090630" cy="2474332"/>
+              <a:off x="1172049" y="3015388"/>
+              <a:ext cx="7090630" cy="2541348"/>
             </a:xfrm>
             <a:custGeom>
               <a:avLst/>
               <a:pathLst>
-                <a:path w="7090630" h="2474332">
+                <a:path w="7090630" h="2541348">
                   <a:moveTo>
-                    <a:pt x="7090630" y="2474332"/>
+                    <a:pt x="7090630" y="2541348"/>
                   </a:moveTo>
                   <a:lnTo>
-                    <a:pt x="7019007" y="2474239"/>
-                  </a:lnTo>
-                  <a:lnTo>
-                    <a:pt x="6947385" y="2474133"/>
-                  </a:lnTo>
-                  <a:lnTo>
-                    <a:pt x="6875762" y="2474014"/>
-                  </a:lnTo>
-                  <a:lnTo>
-                    <a:pt x="6804139" y="2473880"/>
-                  </a:lnTo>
-                  <a:lnTo>
-                    <a:pt x="6732517" y="2473727"/>
-                  </a:lnTo>
-                  <a:lnTo>
-                    <a:pt x="6660894" y="2473555"/>
-                  </a:lnTo>
-                  <a:lnTo>
-                    <a:pt x="6589272" y="2473360"/>
-                  </a:lnTo>
-                  <a:lnTo>
-                    <a:pt x="6517649" y="2473139"/>
-                  </a:lnTo>
-                  <a:lnTo>
-                    <a:pt x="6446027" y="2472889"/>
-                  </a:lnTo>
-                  <a:lnTo>
-                    <a:pt x="6374404" y="2472606"/>
-                  </a:lnTo>
-                  <a:lnTo>
-                    <a:pt x="6302782" y="2472286"/>
-                  </a:lnTo>
-                  <a:lnTo>
-                    <a:pt x="6231159" y="2471924"/>
-                  </a:lnTo>
-                  <a:lnTo>
-                    <a:pt x="6159537" y="2471515"/>
-                  </a:lnTo>
-                  <a:lnTo>
-                    <a:pt x="6087914" y="2471051"/>
-                  </a:lnTo>
-                  <a:lnTo>
-                    <a:pt x="6016292" y="2470527"/>
-                  </a:lnTo>
-                  <a:lnTo>
-                    <a:pt x="5944669" y="2469934"/>
-                  </a:lnTo>
-                  <a:lnTo>
-                    <a:pt x="5873047" y="2469263"/>
-                  </a:lnTo>
-                  <a:lnTo>
-                    <a:pt x="5801424" y="2468503"/>
-                  </a:lnTo>
-                  <a:lnTo>
-                    <a:pt x="5729802" y="2467644"/>
-                  </a:lnTo>
-                  <a:lnTo>
-                    <a:pt x="5658179" y="2466672"/>
-                  </a:lnTo>
-                  <a:lnTo>
-                    <a:pt x="5586557" y="2465572"/>
-                  </a:lnTo>
-                  <a:lnTo>
-                    <a:pt x="5514934" y="2464327"/>
-                  </a:lnTo>
-                  <a:lnTo>
-                    <a:pt x="5443311" y="2462919"/>
-                  </a:lnTo>
-                  <a:lnTo>
-                    <a:pt x="5371689" y="2461325"/>
-                  </a:lnTo>
-                  <a:lnTo>
-                    <a:pt x="5300066" y="2459522"/>
-                  </a:lnTo>
-                  <a:lnTo>
-                    <a:pt x="5228444" y="2457482"/>
-                  </a:lnTo>
-                  <a:lnTo>
-                    <a:pt x="5156821" y="2455174"/>
-                  </a:lnTo>
-                  <a:lnTo>
-                    <a:pt x="5085199" y="2452563"/>
-                  </a:lnTo>
-                  <a:lnTo>
-                    <a:pt x="5013576" y="2449608"/>
-                  </a:lnTo>
-                  <a:lnTo>
-                    <a:pt x="4941954" y="2446264"/>
-                  </a:lnTo>
-                  <a:lnTo>
-                    <a:pt x="4870331" y="2442481"/>
-                  </a:lnTo>
-                  <a:lnTo>
-                    <a:pt x="4798709" y="2438201"/>
-                  </a:lnTo>
-                  <a:lnTo>
-                    <a:pt x="4727086" y="2433358"/>
-                  </a:lnTo>
-                  <a:lnTo>
-                    <a:pt x="4655464" y="2427878"/>
-                  </a:lnTo>
-                  <a:lnTo>
-                    <a:pt x="4583841" y="2421678"/>
-                  </a:lnTo>
-                  <a:lnTo>
-                    <a:pt x="4512219" y="2414663"/>
-                  </a:lnTo>
-                  <a:lnTo>
-                    <a:pt x="4440596" y="2406725"/>
-                  </a:lnTo>
-                  <a:lnTo>
-                    <a:pt x="4368974" y="2397744"/>
-                  </a:lnTo>
-                  <a:lnTo>
-                    <a:pt x="4297351" y="2387583"/>
-                  </a:lnTo>
-                  <a:lnTo>
-                    <a:pt x="4225729" y="2376085"/>
-                  </a:lnTo>
-                  <a:lnTo>
-                    <a:pt x="4154106" y="2363076"/>
-                  </a:lnTo>
-                  <a:lnTo>
-                    <a:pt x="4082483" y="2348357"/>
-                  </a:lnTo>
-                  <a:lnTo>
-                    <a:pt x="4010861" y="2331702"/>
-                  </a:lnTo>
-                  <a:lnTo>
-                    <a:pt x="3939238" y="2312858"/>
-                  </a:lnTo>
-                  <a:lnTo>
-                    <a:pt x="3867616" y="2291537"/>
-                  </a:lnTo>
-                  <a:lnTo>
-                    <a:pt x="3795993" y="2267412"/>
-                  </a:lnTo>
-                  <a:lnTo>
-                    <a:pt x="3724371" y="2240116"/>
-                  </a:lnTo>
-                  <a:lnTo>
-                    <a:pt x="3652748" y="2209232"/>
-                  </a:lnTo>
-                  <a:lnTo>
-                    <a:pt x="3581126" y="2174287"/>
-                  </a:lnTo>
-                  <a:lnTo>
-                    <a:pt x="3509503" y="2134748"/>
-                  </a:lnTo>
-                  <a:lnTo>
-                    <a:pt x="3437881" y="2090011"/>
-                  </a:lnTo>
-                  <a:lnTo>
-                    <a:pt x="3366258" y="2039393"/>
-                  </a:lnTo>
-                  <a:lnTo>
-                    <a:pt x="3294636" y="1982120"/>
-                  </a:lnTo>
-                  <a:lnTo>
-                    <a:pt x="3223013" y="1917318"/>
-                  </a:lnTo>
-                  <a:lnTo>
-                    <a:pt x="3151391" y="1843996"/>
-                  </a:lnTo>
-                  <a:lnTo>
-                    <a:pt x="3079768" y="1761035"/>
-                  </a:lnTo>
-                  <a:lnTo>
-                    <a:pt x="3008146" y="1667167"/>
-                  </a:lnTo>
-                  <a:lnTo>
-                    <a:pt x="2936523" y="1628332"/>
-                  </a:lnTo>
-                  <a:lnTo>
-                    <a:pt x="2864901" y="1605888"/>
-                  </a:lnTo>
-                  <a:lnTo>
-                    <a:pt x="2793278" y="1582849"/>
-                  </a:lnTo>
-                  <a:lnTo>
-                    <a:pt x="2721655" y="1559199"/>
-                  </a:lnTo>
-                  <a:lnTo>
-                    <a:pt x="2650033" y="1534922"/>
-                  </a:lnTo>
-                  <a:lnTo>
-                    <a:pt x="2578410" y="1510002"/>
-                  </a:lnTo>
-                  <a:lnTo>
-                    <a:pt x="2506788" y="1484421"/>
-                  </a:lnTo>
-                  <a:lnTo>
-                    <a:pt x="2435165" y="1458162"/>
-                  </a:lnTo>
-                  <a:lnTo>
-                    <a:pt x="2363543" y="1431207"/>
-                  </a:lnTo>
-                  <a:lnTo>
-                    <a:pt x="2291920" y="1403538"/>
-                  </a:lnTo>
-                  <a:lnTo>
-                    <a:pt x="2220298" y="1375135"/>
-                  </a:lnTo>
-                  <a:lnTo>
-                    <a:pt x="2148675" y="1345979"/>
-                  </a:lnTo>
-                  <a:lnTo>
-                    <a:pt x="2077053" y="1316051"/>
-                  </a:lnTo>
-                  <a:lnTo>
-                    <a:pt x="2005430" y="1285328"/>
-                  </a:lnTo>
-                  <a:lnTo>
-                    <a:pt x="1933808" y="1253792"/>
-                  </a:lnTo>
-                  <a:lnTo>
-                    <a:pt x="1862185" y="1221420"/>
-                  </a:lnTo>
-                  <a:lnTo>
-                    <a:pt x="1790563" y="1188189"/>
-                  </a:lnTo>
-                  <a:lnTo>
-                    <a:pt x="1718940" y="1154078"/>
-                  </a:lnTo>
-                  <a:lnTo>
-                    <a:pt x="1647318" y="1119062"/>
-                  </a:lnTo>
-                  <a:lnTo>
-                    <a:pt x="1575695" y="1083119"/>
-                  </a:lnTo>
-                  <a:lnTo>
-                    <a:pt x="1504073" y="1046222"/>
-                  </a:lnTo>
-                  <a:lnTo>
-                    <a:pt x="1432450" y="1008348"/>
-                  </a:lnTo>
-                  <a:lnTo>
-                    <a:pt x="1360827" y="969469"/>
-                  </a:lnTo>
-                  <a:lnTo>
-                    <a:pt x="1289205" y="929560"/>
-                  </a:lnTo>
-                  <a:lnTo>
-                    <a:pt x="1217582" y="888593"/>
-                  </a:lnTo>
-                  <a:lnTo>
-                    <a:pt x="1145960" y="846540"/>
-                  </a:lnTo>
-                  <a:lnTo>
-                    <a:pt x="1074337" y="803373"/>
-                  </a:lnTo>
-                  <a:lnTo>
-                    <a:pt x="1002715" y="759061"/>
-                  </a:lnTo>
-                  <a:lnTo>
-                    <a:pt x="931092" y="713575"/>
-                  </a:lnTo>
-                  <a:lnTo>
-                    <a:pt x="859470" y="666882"/>
-                  </a:lnTo>
-                  <a:lnTo>
-                    <a:pt x="787847" y="618952"/>
-                  </a:lnTo>
-                  <a:lnTo>
-                    <a:pt x="716225" y="569752"/>
-                  </a:lnTo>
-                  <a:lnTo>
-                    <a:pt x="644602" y="519247"/>
-                  </a:lnTo>
-                  <a:lnTo>
-                    <a:pt x="572980" y="467404"/>
-                  </a:lnTo>
-                  <a:lnTo>
-                    <a:pt x="501357" y="414186"/>
-                  </a:lnTo>
-                  <a:lnTo>
-                    <a:pt x="429735" y="359558"/>
-                  </a:lnTo>
-                  <a:lnTo>
-                    <a:pt x="358112" y="303482"/>
-                  </a:lnTo>
-                  <a:lnTo>
-                    <a:pt x="286490" y="245919"/>
-                  </a:lnTo>
-                  <a:lnTo>
-                    <a:pt x="214867" y="186830"/>
-                  </a:lnTo>
-                  <a:lnTo>
-                    <a:pt x="143245" y="126175"/>
-                  </a:lnTo>
-                  <a:lnTo>
-                    <a:pt x="71622" y="63913"/>
+                    <a:pt x="7019007" y="2541277"/>
+                  </a:lnTo>
+                  <a:lnTo>
+                    <a:pt x="6947385" y="2541197"/>
+                  </a:lnTo>
+                  <a:lnTo>
+                    <a:pt x="6875762" y="2541105"/>
+                  </a:lnTo>
+                  <a:lnTo>
+                    <a:pt x="6804139" y="2541001"/>
+                  </a:lnTo>
+                  <a:lnTo>
+                    <a:pt x="6732517" y="2540882"/>
+                  </a:lnTo>
+                  <a:lnTo>
+                    <a:pt x="6660894" y="2540747"/>
+                  </a:lnTo>
+                  <a:lnTo>
+                    <a:pt x="6589272" y="2540594"/>
+                  </a:lnTo>
+                  <a:lnTo>
+                    <a:pt x="6517649" y="2540419"/>
+                  </a:lnTo>
+                  <a:lnTo>
+                    <a:pt x="6446027" y="2540220"/>
+                  </a:lnTo>
+                  <a:lnTo>
+                    <a:pt x="6374404" y="2539993"/>
+                  </a:lnTo>
+                  <a:lnTo>
+                    <a:pt x="6302782" y="2539735"/>
+                  </a:lnTo>
+                  <a:lnTo>
+                    <a:pt x="6231159" y="2539442"/>
+                  </a:lnTo>
+                  <a:lnTo>
+                    <a:pt x="6159537" y="2539108"/>
+                  </a:lnTo>
+                  <a:lnTo>
+                    <a:pt x="6087914" y="2538728"/>
+                  </a:lnTo>
+                  <a:lnTo>
+                    <a:pt x="6016292" y="2538295"/>
+                  </a:lnTo>
+                  <a:lnTo>
+                    <a:pt x="5944669" y="2537803"/>
+                  </a:lnTo>
+                  <a:lnTo>
+                    <a:pt x="5873047" y="2537243"/>
+                  </a:lnTo>
+                  <a:lnTo>
+                    <a:pt x="5801424" y="2536605"/>
+                  </a:lnTo>
+                  <a:lnTo>
+                    <a:pt x="5729802" y="2535880"/>
+                  </a:lnTo>
+                  <a:lnTo>
+                    <a:pt x="5658179" y="2535054"/>
+                  </a:lnTo>
+                  <a:lnTo>
+                    <a:pt x="5586557" y="2534114"/>
+                  </a:lnTo>
+                  <a:lnTo>
+                    <a:pt x="5514934" y="2533045"/>
+                  </a:lnTo>
+                  <a:lnTo>
+                    <a:pt x="5443311" y="2531828"/>
+                  </a:lnTo>
+                  <a:lnTo>
+                    <a:pt x="5371689" y="2530443"/>
+                  </a:lnTo>
+                  <a:lnTo>
+                    <a:pt x="5300066" y="2528866"/>
+                  </a:lnTo>
+                  <a:lnTo>
+                    <a:pt x="5228444" y="2527073"/>
+                  </a:lnTo>
+                  <a:lnTo>
+                    <a:pt x="5156821" y="2525031"/>
+                  </a:lnTo>
+                  <a:lnTo>
+                    <a:pt x="5085199" y="2522708"/>
+                  </a:lnTo>
+                  <a:lnTo>
+                    <a:pt x="5013576" y="2520064"/>
+                  </a:lnTo>
+                  <a:lnTo>
+                    <a:pt x="4941954" y="2517054"/>
+                  </a:lnTo>
+                  <a:lnTo>
+                    <a:pt x="4870331" y="2513630"/>
+                  </a:lnTo>
+                  <a:lnTo>
+                    <a:pt x="4798709" y="2509733"/>
+                  </a:lnTo>
+                  <a:lnTo>
+                    <a:pt x="4727086" y="2505297"/>
+                  </a:lnTo>
+                  <a:lnTo>
+                    <a:pt x="4655464" y="2500250"/>
+                  </a:lnTo>
+                  <a:lnTo>
+                    <a:pt x="4583841" y="2494505"/>
+                  </a:lnTo>
+                  <a:lnTo>
+                    <a:pt x="4512219" y="2487967"/>
+                  </a:lnTo>
+                  <a:lnTo>
+                    <a:pt x="4440596" y="2480527"/>
+                  </a:lnTo>
+                  <a:lnTo>
+                    <a:pt x="4368974" y="2472060"/>
+                  </a:lnTo>
+                  <a:lnTo>
+                    <a:pt x="4297351" y="2462424"/>
+                  </a:lnTo>
+                  <a:lnTo>
+                    <a:pt x="4225729" y="2451458"/>
+                  </a:lnTo>
+                  <a:lnTo>
+                    <a:pt x="4154106" y="2438977"/>
+                  </a:lnTo>
+                  <a:lnTo>
+                    <a:pt x="4082483" y="2424774"/>
+                  </a:lnTo>
+                  <a:lnTo>
+                    <a:pt x="4010861" y="2408610"/>
+                  </a:lnTo>
+                  <a:lnTo>
+                    <a:pt x="3939238" y="2390215"/>
+                  </a:lnTo>
+                  <a:lnTo>
+                    <a:pt x="3867616" y="2369280"/>
+                  </a:lnTo>
+                  <a:lnTo>
+                    <a:pt x="3795993" y="2345455"/>
+                  </a:lnTo>
+                  <a:lnTo>
+                    <a:pt x="3724371" y="2318341"/>
+                  </a:lnTo>
+                  <a:lnTo>
+                    <a:pt x="3652748" y="2287483"/>
+                  </a:lnTo>
+                  <a:lnTo>
+                    <a:pt x="3581126" y="2252366"/>
+                  </a:lnTo>
+                  <a:lnTo>
+                    <a:pt x="3509503" y="2212401"/>
+                  </a:lnTo>
+                  <a:lnTo>
+                    <a:pt x="3437881" y="2166918"/>
+                  </a:lnTo>
+                  <a:lnTo>
+                    <a:pt x="3366258" y="2115157"/>
+                  </a:lnTo>
+                  <a:lnTo>
+                    <a:pt x="3294636" y="2056249"/>
+                  </a:lnTo>
+                  <a:lnTo>
+                    <a:pt x="3223013" y="1989210"/>
+                  </a:lnTo>
+                  <a:lnTo>
+                    <a:pt x="3151391" y="1912915"/>
+                  </a:lnTo>
+                  <a:lnTo>
+                    <a:pt x="3079768" y="1826088"/>
+                  </a:lnTo>
+                  <a:lnTo>
+                    <a:pt x="3008146" y="1727275"/>
+                  </a:lnTo>
+                  <a:lnTo>
+                    <a:pt x="2936523" y="1693091"/>
+                  </a:lnTo>
+                  <a:lnTo>
+                    <a:pt x="2864901" y="1670078"/>
+                  </a:lnTo>
+                  <a:lnTo>
+                    <a:pt x="2793278" y="1646440"/>
+                  </a:lnTo>
+                  <a:lnTo>
+                    <a:pt x="2721655" y="1622162"/>
+                  </a:lnTo>
+                  <a:lnTo>
+                    <a:pt x="2650033" y="1597225"/>
+                  </a:lnTo>
+                  <a:lnTo>
+                    <a:pt x="2578410" y="1571613"/>
+                  </a:lnTo>
+                  <a:lnTo>
+                    <a:pt x="2506788" y="1545306"/>
+                  </a:lnTo>
+                  <a:lnTo>
+                    <a:pt x="2435165" y="1518285"/>
+                  </a:lnTo>
+                  <a:lnTo>
+                    <a:pt x="2363543" y="1490532"/>
+                  </a:lnTo>
+                  <a:lnTo>
+                    <a:pt x="2291920" y="1462027"/>
+                  </a:lnTo>
+                  <a:lnTo>
+                    <a:pt x="2220298" y="1432748"/>
+                  </a:lnTo>
+                  <a:lnTo>
+                    <a:pt x="2148675" y="1402676"/>
+                  </a:lnTo>
+                  <a:lnTo>
+                    <a:pt x="2077053" y="1371788"/>
+                  </a:lnTo>
+                  <a:lnTo>
+                    <a:pt x="2005430" y="1340063"/>
+                  </a:lnTo>
+                  <a:lnTo>
+                    <a:pt x="1933808" y="1307478"/>
+                  </a:lnTo>
+                  <a:lnTo>
+                    <a:pt x="1862185" y="1274009"/>
+                  </a:lnTo>
+                  <a:lnTo>
+                    <a:pt x="1790563" y="1239632"/>
+                  </a:lnTo>
+                  <a:lnTo>
+                    <a:pt x="1718940" y="1204324"/>
+                  </a:lnTo>
+                  <a:lnTo>
+                    <a:pt x="1647318" y="1168058"/>
+                  </a:lnTo>
+                  <a:lnTo>
+                    <a:pt x="1575695" y="1130809"/>
+                  </a:lnTo>
+                  <a:lnTo>
+                    <a:pt x="1504073" y="1092550"/>
+                  </a:lnTo>
+                  <a:lnTo>
+                    <a:pt x="1432450" y="1053254"/>
+                  </a:lnTo>
+                  <a:lnTo>
+                    <a:pt x="1360827" y="1012892"/>
+                  </a:lnTo>
+                  <a:lnTo>
+                    <a:pt x="1289205" y="971435"/>
+                  </a:lnTo>
+                  <a:lnTo>
+                    <a:pt x="1217582" y="928855"/>
+                  </a:lnTo>
+                  <a:lnTo>
+                    <a:pt x="1145960" y="885120"/>
+                  </a:lnTo>
+                  <a:lnTo>
+                    <a:pt x="1074337" y="840200"/>
+                  </a:lnTo>
+                  <a:lnTo>
+                    <a:pt x="1002715" y="794061"/>
+                  </a:lnTo>
+                  <a:lnTo>
+                    <a:pt x="931092" y="746672"/>
+                  </a:lnTo>
+                  <a:lnTo>
+                    <a:pt x="859470" y="697997"/>
+                  </a:lnTo>
+                  <a:lnTo>
+                    <a:pt x="787847" y="648003"/>
+                  </a:lnTo>
+                  <a:lnTo>
+                    <a:pt x="716225" y="596653"/>
+                  </a:lnTo>
+                  <a:lnTo>
+                    <a:pt x="644602" y="543911"/>
+                  </a:lnTo>
+                  <a:lnTo>
+                    <a:pt x="572980" y="489739"/>
+                  </a:lnTo>
+                  <a:lnTo>
+                    <a:pt x="501357" y="434098"/>
+                  </a:lnTo>
+                  <a:lnTo>
+                    <a:pt x="429735" y="376948"/>
+                  </a:lnTo>
+                  <a:lnTo>
+                    <a:pt x="358112" y="318249"/>
+                  </a:lnTo>
+                  <a:lnTo>
+                    <a:pt x="286490" y="257959"/>
+                  </a:lnTo>
+                  <a:lnTo>
+                    <a:pt x="214867" y="196033"/>
+                  </a:lnTo>
+                  <a:lnTo>
+                    <a:pt x="143245" y="132429"/>
+                  </a:lnTo>
+                  <a:lnTo>
+                    <a:pt x="71622" y="67100"/>
                   </a:lnTo>
                   <a:lnTo>
                     <a:pt x="0" y="0"/>
@@ -4493,246 +4493,243 @@
           </p:nvSpPr>
           <p:spPr>
             <a:xfrm>
-              <a:off x="2792119" y="2073503"/>
-              <a:ext cx="5470559" cy="3472285"/>
+              <a:off x="2853715" y="2073503"/>
+              <a:ext cx="5408963" cy="3474146"/>
             </a:xfrm>
             <a:custGeom>
               <a:avLst/>
               <a:pathLst>
-                <a:path w="5470559" h="3472285">
+                <a:path w="5408963" h="3474146">
                   <a:moveTo>
                     <a:pt x="0" y="0"/>
                   </a:moveTo>
                   <a:lnTo>
-                    <a:pt x="27247" y="100034"/>
-                  </a:lnTo>
-                  <a:lnTo>
-                    <a:pt x="98870" y="344022"/>
-                  </a:lnTo>
-                  <a:lnTo>
-                    <a:pt x="170492" y="570417"/>
-                  </a:lnTo>
-                  <a:lnTo>
-                    <a:pt x="242115" y="780488"/>
-                  </a:lnTo>
-                  <a:lnTo>
-                    <a:pt x="313737" y="975411"/>
-                  </a:lnTo>
-                  <a:lnTo>
-                    <a:pt x="385360" y="1156278"/>
-                  </a:lnTo>
-                  <a:lnTo>
-                    <a:pt x="456982" y="1324104"/>
-                  </a:lnTo>
-                  <a:lnTo>
-                    <a:pt x="528605" y="1479829"/>
-                  </a:lnTo>
-                  <a:lnTo>
-                    <a:pt x="600227" y="1624324"/>
-                  </a:lnTo>
-                  <a:lnTo>
-                    <a:pt x="671850" y="1758401"/>
-                  </a:lnTo>
-                  <a:lnTo>
-                    <a:pt x="743473" y="1882810"/>
-                  </a:lnTo>
-                  <a:lnTo>
-                    <a:pt x="815095" y="1998248"/>
-                  </a:lnTo>
-                  <a:lnTo>
-                    <a:pt x="886718" y="2105362"/>
-                  </a:lnTo>
-                  <a:lnTo>
-                    <a:pt x="958340" y="2204753"/>
-                  </a:lnTo>
-                  <a:lnTo>
-                    <a:pt x="1029963" y="2296977"/>
-                  </a:lnTo>
-                  <a:lnTo>
-                    <a:pt x="1101585" y="2382551"/>
-                  </a:lnTo>
-                  <a:lnTo>
-                    <a:pt x="1173208" y="2461954"/>
-                  </a:lnTo>
-                  <a:lnTo>
-                    <a:pt x="1244830" y="2535632"/>
-                  </a:lnTo>
-                  <a:lnTo>
-                    <a:pt x="1316453" y="2603997"/>
-                  </a:lnTo>
-                  <a:lnTo>
-                    <a:pt x="1388075" y="2667433"/>
-                  </a:lnTo>
-                  <a:lnTo>
-                    <a:pt x="1459698" y="2726295"/>
-                  </a:lnTo>
-                  <a:lnTo>
-                    <a:pt x="1531320" y="2780912"/>
-                  </a:lnTo>
-                  <a:lnTo>
-                    <a:pt x="1602943" y="2831591"/>
-                  </a:lnTo>
-                  <a:lnTo>
-                    <a:pt x="1674565" y="2878616"/>
-                  </a:lnTo>
-                  <a:lnTo>
-                    <a:pt x="1746188" y="2922250"/>
-                  </a:lnTo>
-                  <a:lnTo>
-                    <a:pt x="1817810" y="2962737"/>
-                  </a:lnTo>
-                  <a:lnTo>
-                    <a:pt x="1889433" y="3000306"/>
-                  </a:lnTo>
-                  <a:lnTo>
-                    <a:pt x="1961055" y="3035165"/>
-                  </a:lnTo>
-                  <a:lnTo>
-                    <a:pt x="2032678" y="3067511"/>
-                  </a:lnTo>
-                  <a:lnTo>
-                    <a:pt x="2104301" y="3097524"/>
-                  </a:lnTo>
-                  <a:lnTo>
-                    <a:pt x="2175923" y="3125373"/>
-                  </a:lnTo>
-                  <a:lnTo>
-                    <a:pt x="2247546" y="3151214"/>
-                  </a:lnTo>
-                  <a:lnTo>
-                    <a:pt x="2319168" y="3175192"/>
-                  </a:lnTo>
-                  <a:lnTo>
-                    <a:pt x="2390791" y="3197441"/>
-                  </a:lnTo>
-                  <a:lnTo>
-                    <a:pt x="2462413" y="3218085"/>
-                  </a:lnTo>
-                  <a:lnTo>
-                    <a:pt x="2534036" y="3237241"/>
-                  </a:lnTo>
-                  <a:lnTo>
-                    <a:pt x="2605658" y="3255016"/>
-                  </a:lnTo>
-                  <a:lnTo>
-                    <a:pt x="2677281" y="3271509"/>
-                  </a:lnTo>
-                  <a:lnTo>
-                    <a:pt x="2748903" y="3286813"/>
-                  </a:lnTo>
-                  <a:lnTo>
-                    <a:pt x="2820526" y="3301013"/>
-                  </a:lnTo>
-                  <a:lnTo>
-                    <a:pt x="2892148" y="3314189"/>
-                  </a:lnTo>
-                  <a:lnTo>
-                    <a:pt x="2963771" y="3326415"/>
-                  </a:lnTo>
-                  <a:lnTo>
-                    <a:pt x="3035393" y="3337760"/>
-                  </a:lnTo>
-                  <a:lnTo>
-                    <a:pt x="3107016" y="3348287"/>
-                  </a:lnTo>
-                  <a:lnTo>
-                    <a:pt x="3178638" y="3358054"/>
-                  </a:lnTo>
-                  <a:lnTo>
-                    <a:pt x="3250261" y="3367117"/>
-                  </a:lnTo>
-                  <a:lnTo>
-                    <a:pt x="3321883" y="3375527"/>
-                  </a:lnTo>
-                  <a:lnTo>
-                    <a:pt x="3393506" y="3383330"/>
-                  </a:lnTo>
-                  <a:lnTo>
-                    <a:pt x="3465129" y="3390571"/>
-                  </a:lnTo>
-                  <a:lnTo>
-                    <a:pt x="3536751" y="3397290"/>
-                  </a:lnTo>
-                  <a:lnTo>
-                    <a:pt x="3608374" y="3403524"/>
-                  </a:lnTo>
-                  <a:lnTo>
-                    <a:pt x="3679996" y="3409308"/>
-                  </a:lnTo>
-                  <a:lnTo>
-                    <a:pt x="3751619" y="3414676"/>
-                  </a:lnTo>
-                  <a:lnTo>
-                    <a:pt x="3823241" y="3419656"/>
-                  </a:lnTo>
-                  <a:lnTo>
-                    <a:pt x="3894864" y="3424278"/>
-                  </a:lnTo>
-                  <a:lnTo>
-                    <a:pt x="3966486" y="3428566"/>
-                  </a:lnTo>
-                  <a:lnTo>
-                    <a:pt x="4038109" y="3432545"/>
-                  </a:lnTo>
-                  <a:lnTo>
-                    <a:pt x="4109731" y="3436237"/>
-                  </a:lnTo>
-                  <a:lnTo>
-                    <a:pt x="4181354" y="3439662"/>
-                  </a:lnTo>
-                  <a:lnTo>
-                    <a:pt x="4252976" y="3442841"/>
-                  </a:lnTo>
-                  <a:lnTo>
-                    <a:pt x="4324599" y="3445791"/>
-                  </a:lnTo>
-                  <a:lnTo>
-                    <a:pt x="4396221" y="3448527"/>
-                  </a:lnTo>
-                  <a:lnTo>
-                    <a:pt x="4467844" y="3451067"/>
-                  </a:lnTo>
-                  <a:lnTo>
-                    <a:pt x="4539466" y="3453423"/>
-                  </a:lnTo>
-                  <a:lnTo>
-                    <a:pt x="4611089" y="3455610"/>
-                  </a:lnTo>
-                  <a:lnTo>
-                    <a:pt x="4682711" y="3457639"/>
-                  </a:lnTo>
-                  <a:lnTo>
-                    <a:pt x="4754334" y="3459521"/>
-                  </a:lnTo>
-                  <a:lnTo>
-                    <a:pt x="4825957" y="3461268"/>
-                  </a:lnTo>
-                  <a:lnTo>
-                    <a:pt x="4897579" y="3462889"/>
-                  </a:lnTo>
-                  <a:lnTo>
-                    <a:pt x="4969202" y="3464393"/>
-                  </a:lnTo>
-                  <a:lnTo>
-                    <a:pt x="5040824" y="3465788"/>
-                  </a:lnTo>
-                  <a:lnTo>
-                    <a:pt x="5112447" y="3467083"/>
-                  </a:lnTo>
-                  <a:lnTo>
-                    <a:pt x="5184069" y="3468285"/>
-                  </a:lnTo>
-                  <a:lnTo>
-                    <a:pt x="5255692" y="3469400"/>
-                  </a:lnTo>
-                  <a:lnTo>
-                    <a:pt x="5327314" y="3470434"/>
-                  </a:lnTo>
-                  <a:lnTo>
-                    <a:pt x="5398937" y="3471394"/>
-                  </a:lnTo>
-                  <a:lnTo>
-                    <a:pt x="5470559" y="3472285"/>
+                    <a:pt x="37274" y="141183"/>
+                  </a:lnTo>
+                  <a:lnTo>
+                    <a:pt x="108896" y="392103"/>
+                  </a:lnTo>
+                  <a:lnTo>
+                    <a:pt x="180519" y="624188"/>
+                  </a:lnTo>
+                  <a:lnTo>
+                    <a:pt x="252141" y="838850"/>
+                  </a:lnTo>
+                  <a:lnTo>
+                    <a:pt x="323764" y="1037397"/>
+                  </a:lnTo>
+                  <a:lnTo>
+                    <a:pt x="395386" y="1221040"/>
+                  </a:lnTo>
+                  <a:lnTo>
+                    <a:pt x="467009" y="1390898"/>
+                  </a:lnTo>
+                  <a:lnTo>
+                    <a:pt x="538631" y="1548004"/>
+                  </a:lnTo>
+                  <a:lnTo>
+                    <a:pt x="610254" y="1693317"/>
+                  </a:lnTo>
+                  <a:lnTo>
+                    <a:pt x="681876" y="1827721"/>
+                  </a:lnTo>
+                  <a:lnTo>
+                    <a:pt x="753499" y="1952036"/>
+                  </a:lnTo>
+                  <a:lnTo>
+                    <a:pt x="825121" y="2067019"/>
+                  </a:lnTo>
+                  <a:lnTo>
+                    <a:pt x="896744" y="2173370"/>
+                  </a:lnTo>
+                  <a:lnTo>
+                    <a:pt x="968366" y="2271738"/>
+                  </a:lnTo>
+                  <a:lnTo>
+                    <a:pt x="1039989" y="2362721"/>
+                  </a:lnTo>
+                  <a:lnTo>
+                    <a:pt x="1111612" y="2446875"/>
+                  </a:lnTo>
+                  <a:lnTo>
+                    <a:pt x="1183234" y="2524711"/>
+                  </a:lnTo>
+                  <a:lnTo>
+                    <a:pt x="1254857" y="2596704"/>
+                  </a:lnTo>
+                  <a:lnTo>
+                    <a:pt x="1326479" y="2663293"/>
+                  </a:lnTo>
+                  <a:lnTo>
+                    <a:pt x="1398102" y="2724883"/>
+                  </a:lnTo>
+                  <a:lnTo>
+                    <a:pt x="1469724" y="2781849"/>
+                  </a:lnTo>
+                  <a:lnTo>
+                    <a:pt x="1541347" y="2834539"/>
+                  </a:lnTo>
+                  <a:lnTo>
+                    <a:pt x="1612969" y="2883274"/>
+                  </a:lnTo>
+                  <a:lnTo>
+                    <a:pt x="1684592" y="2928351"/>
+                  </a:lnTo>
+                  <a:lnTo>
+                    <a:pt x="1756214" y="2970043"/>
+                  </a:lnTo>
+                  <a:lnTo>
+                    <a:pt x="1827837" y="3008606"/>
+                  </a:lnTo>
+                  <a:lnTo>
+                    <a:pt x="1899459" y="3044274"/>
+                  </a:lnTo>
+                  <a:lnTo>
+                    <a:pt x="1971082" y="3077264"/>
+                  </a:lnTo>
+                  <a:lnTo>
+                    <a:pt x="2042704" y="3107778"/>
+                  </a:lnTo>
+                  <a:lnTo>
+                    <a:pt x="2114327" y="3136002"/>
+                  </a:lnTo>
+                  <a:lnTo>
+                    <a:pt x="2185949" y="3162106"/>
+                  </a:lnTo>
+                  <a:lnTo>
+                    <a:pt x="2257572" y="3186251"/>
+                  </a:lnTo>
+                  <a:lnTo>
+                    <a:pt x="2329194" y="3208584"/>
+                  </a:lnTo>
+                  <a:lnTo>
+                    <a:pt x="2400817" y="3229240"/>
+                  </a:lnTo>
+                  <a:lnTo>
+                    <a:pt x="2472440" y="3248345"/>
+                  </a:lnTo>
+                  <a:lnTo>
+                    <a:pt x="2544062" y="3266016"/>
+                  </a:lnTo>
+                  <a:lnTo>
+                    <a:pt x="2615685" y="3282361"/>
+                  </a:lnTo>
+                  <a:lnTo>
+                    <a:pt x="2687307" y="3297478"/>
+                  </a:lnTo>
+                  <a:lnTo>
+                    <a:pt x="2758930" y="3311461"/>
+                  </a:lnTo>
+                  <a:lnTo>
+                    <a:pt x="2830552" y="3324394"/>
+                  </a:lnTo>
+                  <a:lnTo>
+                    <a:pt x="2902175" y="3336357"/>
+                  </a:lnTo>
+                  <a:lnTo>
+                    <a:pt x="2973797" y="3347421"/>
+                  </a:lnTo>
+                  <a:lnTo>
+                    <a:pt x="3045420" y="3357655"/>
+                  </a:lnTo>
+                  <a:lnTo>
+                    <a:pt x="3117042" y="3367120"/>
+                  </a:lnTo>
+                  <a:lnTo>
+                    <a:pt x="3188665" y="3375875"/>
+                  </a:lnTo>
+                  <a:lnTo>
+                    <a:pt x="3260287" y="3383973"/>
+                  </a:lnTo>
+                  <a:lnTo>
+                    <a:pt x="3331910" y="3391463"/>
+                  </a:lnTo>
+                  <a:lnTo>
+                    <a:pt x="3403532" y="3398390"/>
+                  </a:lnTo>
+                  <a:lnTo>
+                    <a:pt x="3475155" y="3404798"/>
+                  </a:lnTo>
+                  <a:lnTo>
+                    <a:pt x="3546777" y="3410724"/>
+                  </a:lnTo>
+                  <a:lnTo>
+                    <a:pt x="3618400" y="3416206"/>
+                  </a:lnTo>
+                  <a:lnTo>
+                    <a:pt x="3690022" y="3421276"/>
+                  </a:lnTo>
+                  <a:lnTo>
+                    <a:pt x="3761645" y="3425966"/>
+                  </a:lnTo>
+                  <a:lnTo>
+                    <a:pt x="3833268" y="3430303"/>
+                  </a:lnTo>
+                  <a:lnTo>
+                    <a:pt x="3904890" y="3434315"/>
+                  </a:lnTo>
+                  <a:lnTo>
+                    <a:pt x="3976513" y="3438026"/>
+                  </a:lnTo>
+                  <a:lnTo>
+                    <a:pt x="4048135" y="3441458"/>
+                  </a:lnTo>
+                  <a:lnTo>
+                    <a:pt x="4119758" y="3444632"/>
+                  </a:lnTo>
+                  <a:lnTo>
+                    <a:pt x="4191380" y="3447569"/>
+                  </a:lnTo>
+                  <a:lnTo>
+                    <a:pt x="4263003" y="3450284"/>
+                  </a:lnTo>
+                  <a:lnTo>
+                    <a:pt x="4334625" y="3452796"/>
+                  </a:lnTo>
+                  <a:lnTo>
+                    <a:pt x="4406248" y="3455120"/>
+                  </a:lnTo>
+                  <a:lnTo>
+                    <a:pt x="4477870" y="3457269"/>
+                  </a:lnTo>
+                  <a:lnTo>
+                    <a:pt x="4549493" y="3459256"/>
+                  </a:lnTo>
+                  <a:lnTo>
+                    <a:pt x="4621115" y="3461095"/>
+                  </a:lnTo>
+                  <a:lnTo>
+                    <a:pt x="4692738" y="3462795"/>
+                  </a:lnTo>
+                  <a:lnTo>
+                    <a:pt x="4764360" y="3464368"/>
+                  </a:lnTo>
+                  <a:lnTo>
+                    <a:pt x="4835983" y="3465823"/>
+                  </a:lnTo>
+                  <a:lnTo>
+                    <a:pt x="4907605" y="3467168"/>
+                  </a:lnTo>
+                  <a:lnTo>
+                    <a:pt x="4979228" y="3468413"/>
+                  </a:lnTo>
+                  <a:lnTo>
+                    <a:pt x="5050850" y="3469564"/>
+                  </a:lnTo>
+                  <a:lnTo>
+                    <a:pt x="5122473" y="3470628"/>
+                  </a:lnTo>
+                  <a:lnTo>
+                    <a:pt x="5194096" y="3471613"/>
+                  </a:lnTo>
+                  <a:lnTo>
+                    <a:pt x="5265718" y="3472524"/>
+                  </a:lnTo>
+                  <a:lnTo>
+                    <a:pt x="5337341" y="3473366"/>
+                  </a:lnTo>
+                  <a:lnTo>
+                    <a:pt x="5408963" y="3474146"/>
                   </a:lnTo>
                 </a:path>
               </a:pathLst>
@@ -4804,7 +4801,7 @@
           </p:nvSpPr>
           <p:spPr>
             <a:xfrm>
-              <a:off x="4164901" y="2073503"/>
+              <a:off x="4170171" y="2073503"/>
               <a:ext cx="0" cy="3649639"/>
             </a:xfrm>
             <a:custGeom>
@@ -5077,7 +5074,7 @@
           </p:nvSpPr>
           <p:spPr>
             <a:xfrm>
-              <a:off x="1382692" y="5785772"/>
+              <a:off x="1383511" y="5785772"/>
               <a:ext cx="161574" cy="80101"/>
             </a:xfrm>
             <a:prstGeom prst="rect">
@@ -5123,7 +5120,7 @@
           </p:nvSpPr>
           <p:spPr>
             <a:xfrm>
-              <a:off x="2284877" y="5785772"/>
+              <a:off x="2285456" y="5785772"/>
               <a:ext cx="161574" cy="80101"/>
             </a:xfrm>
             <a:prstGeom prst="rect">
@@ -5169,7 +5166,7 @@
           </p:nvSpPr>
           <p:spPr>
             <a:xfrm>
-              <a:off x="3187061" y="5785772"/>
+              <a:off x="3187401" y="5785772"/>
               <a:ext cx="161574" cy="80101"/>
             </a:xfrm>
             <a:prstGeom prst="rect">
@@ -5215,7 +5212,7 @@
           </p:nvSpPr>
           <p:spPr>
             <a:xfrm>
-              <a:off x="4138944" y="5785772"/>
+              <a:off x="4139043" y="5785772"/>
               <a:ext cx="62179" cy="80101"/>
             </a:xfrm>
             <a:prstGeom prst="rect">
@@ -5261,7 +5258,7 @@
           </p:nvSpPr>
           <p:spPr>
             <a:xfrm>
-              <a:off x="5010039" y="5785772"/>
+              <a:off x="5009898" y="5785772"/>
               <a:ext cx="124358" cy="80101"/>
             </a:xfrm>
             <a:prstGeom prst="rect">
@@ -5307,7 +5304,7 @@
           </p:nvSpPr>
           <p:spPr>
             <a:xfrm>
-              <a:off x="5912223" y="5785772"/>
+              <a:off x="5911843" y="5785772"/>
               <a:ext cx="124358" cy="80101"/>
             </a:xfrm>
             <a:prstGeom prst="rect">
@@ -5353,7 +5350,7 @@
           </p:nvSpPr>
           <p:spPr>
             <a:xfrm>
-              <a:off x="6814408" y="5785772"/>
+              <a:off x="6813788" y="5785772"/>
               <a:ext cx="124358" cy="80101"/>
             </a:xfrm>
             <a:prstGeom prst="rect">
@@ -5399,7 +5396,7 @@
           </p:nvSpPr>
           <p:spPr>
             <a:xfrm>
-              <a:off x="7716592" y="5785772"/>
+              <a:off x="7715733" y="5785772"/>
               <a:ext cx="124358" cy="80101"/>
             </a:xfrm>
             <a:prstGeom prst="rect">
@@ -5570,7 +5567,7 @@
                   <a:latin typeface="Helvetica"/>
                   <a:cs typeface="Helvetica"/>
                 </a:rPr>
-                <a:t>subHR per 10 % decline: 2.57 (1.39-4.74), p_Bonf = 0.015 (n = 6)  |  per IQR decline (Δ = 27.4 %): 13.30 (2.47-71.54)  |  IQR: [-12.6, 14.8] %</a:t>
+                <a:t>subHR per 10 % decline: 2.67 (1.40-5.10), p_Bonf = 0.017 (n = 6)  |  per IQR decline (Δ = 27.2 %): 14.51 (2.50-84.12)  |  IQR: [-12.3, 14.9] %</a:t>
               </a:r>
             </a:p>
           </p:txBody>
